--- a/Teachers/Figures/make_figures.pptx
+++ b/Teachers/Figures/make_figures.pptx
@@ -108,6 +108,11 @@
       </a:defRPr>
     </a:lvl9pPr>
   </p:defaultTextStyle>
+  <p:extLst>
+    <p:ext uri="{EFAFB233-063F-42B5-8137-9DF3F51BA10A}">
+      <p15:sldGuideLst xmlns:p15="http://schemas.microsoft.com/office/powerpoint/2012/main"/>
+    </p:ext>
+  </p:extLst>
 </p:presentation>
 </file>
 
@@ -193,7 +198,7 @@
           <a:p>
             <a:fld id="{B3F190BB-0568-5849-97E9-7CC984FEB8A5}" type="datetimeFigureOut">
               <a:rPr lang="da-DK" smtClean="0"/>
-              <a:t>22.11.2024</a:t>
+              <a:t>27.03.2025</a:t>
             </a:fld>
             <a:endParaRPr lang="da-DK"/>
           </a:p>
@@ -691,7 +696,7 @@
           <a:p>
             <a:fld id="{24B4D684-1A4E-3A4C-BB71-BA4209553AB4}" type="datetimeFigureOut">
               <a:rPr lang="da-DK" smtClean="0"/>
-              <a:t>22.11.2024</a:t>
+              <a:t>27.03.2025</a:t>
             </a:fld>
             <a:endParaRPr lang="da-DK"/>
           </a:p>
@@ -889,7 +894,7 @@
           <a:p>
             <a:fld id="{24B4D684-1A4E-3A4C-BB71-BA4209553AB4}" type="datetimeFigureOut">
               <a:rPr lang="da-DK" smtClean="0"/>
-              <a:t>22.11.2024</a:t>
+              <a:t>27.03.2025</a:t>
             </a:fld>
             <a:endParaRPr lang="da-DK"/>
           </a:p>
@@ -1097,7 +1102,7 @@
           <a:p>
             <a:fld id="{24B4D684-1A4E-3A4C-BB71-BA4209553AB4}" type="datetimeFigureOut">
               <a:rPr lang="da-DK" smtClean="0"/>
-              <a:t>22.11.2024</a:t>
+              <a:t>27.03.2025</a:t>
             </a:fld>
             <a:endParaRPr lang="da-DK"/>
           </a:p>
@@ -1295,7 +1300,7 @@
           <a:p>
             <a:fld id="{24B4D684-1A4E-3A4C-BB71-BA4209553AB4}" type="datetimeFigureOut">
               <a:rPr lang="da-DK" smtClean="0"/>
-              <a:t>22.11.2024</a:t>
+              <a:t>27.03.2025</a:t>
             </a:fld>
             <a:endParaRPr lang="da-DK"/>
           </a:p>
@@ -1570,7 +1575,7 @@
           <a:p>
             <a:fld id="{24B4D684-1A4E-3A4C-BB71-BA4209553AB4}" type="datetimeFigureOut">
               <a:rPr lang="da-DK" smtClean="0"/>
-              <a:t>22.11.2024</a:t>
+              <a:t>27.03.2025</a:t>
             </a:fld>
             <a:endParaRPr lang="da-DK"/>
           </a:p>
@@ -1835,7 +1840,7 @@
           <a:p>
             <a:fld id="{24B4D684-1A4E-3A4C-BB71-BA4209553AB4}" type="datetimeFigureOut">
               <a:rPr lang="da-DK" smtClean="0"/>
-              <a:t>22.11.2024</a:t>
+              <a:t>27.03.2025</a:t>
             </a:fld>
             <a:endParaRPr lang="da-DK"/>
           </a:p>
@@ -2247,7 +2252,7 @@
           <a:p>
             <a:fld id="{24B4D684-1A4E-3A4C-BB71-BA4209553AB4}" type="datetimeFigureOut">
               <a:rPr lang="da-DK" smtClean="0"/>
-              <a:t>22.11.2024</a:t>
+              <a:t>27.03.2025</a:t>
             </a:fld>
             <a:endParaRPr lang="da-DK"/>
           </a:p>
@@ -2388,7 +2393,7 @@
           <a:p>
             <a:fld id="{24B4D684-1A4E-3A4C-BB71-BA4209553AB4}" type="datetimeFigureOut">
               <a:rPr lang="da-DK" smtClean="0"/>
-              <a:t>22.11.2024</a:t>
+              <a:t>27.03.2025</a:t>
             </a:fld>
             <a:endParaRPr lang="da-DK"/>
           </a:p>
@@ -2501,7 +2506,7 @@
           <a:p>
             <a:fld id="{24B4D684-1A4E-3A4C-BB71-BA4209553AB4}" type="datetimeFigureOut">
               <a:rPr lang="da-DK" smtClean="0"/>
-              <a:t>22.11.2024</a:t>
+              <a:t>27.03.2025</a:t>
             </a:fld>
             <a:endParaRPr lang="da-DK"/>
           </a:p>
@@ -2812,7 +2817,7 @@
           <a:p>
             <a:fld id="{24B4D684-1A4E-3A4C-BB71-BA4209553AB4}" type="datetimeFigureOut">
               <a:rPr lang="da-DK" smtClean="0"/>
-              <a:t>22.11.2024</a:t>
+              <a:t>27.03.2025</a:t>
             </a:fld>
             <a:endParaRPr lang="da-DK"/>
           </a:p>
@@ -3100,7 +3105,7 @@
           <a:p>
             <a:fld id="{24B4D684-1A4E-3A4C-BB71-BA4209553AB4}" type="datetimeFigureOut">
               <a:rPr lang="da-DK" smtClean="0"/>
-              <a:t>22.11.2024</a:t>
+              <a:t>27.03.2025</a:t>
             </a:fld>
             <a:endParaRPr lang="da-DK"/>
           </a:p>
@@ -3341,7 +3346,7 @@
           <a:p>
             <a:fld id="{24B4D684-1A4E-3A4C-BB71-BA4209553AB4}" type="datetimeFigureOut">
               <a:rPr lang="da-DK" smtClean="0"/>
-              <a:t>22.11.2024</a:t>
+              <a:t>27.03.2025</a:t>
             </a:fld>
             <a:endParaRPr lang="da-DK"/>
           </a:p>
@@ -4540,12 +4545,125 @@
           </a:prstGeom>
         </p:spPr>
       </p:pic>
+      <p:sp>
+        <p:nvSpPr>
+          <p:cNvPr id="80" name="Tekstfelt 79">
+            <a:extLst>
+              <a:ext uri="{FF2B5EF4-FFF2-40B4-BE49-F238E27FC236}">
+                <a16:creationId xmlns:a16="http://schemas.microsoft.com/office/drawing/2014/main" id="{4F317280-E151-1330-C016-4BCD5092B0AE}"/>
+              </a:ext>
+            </a:extLst>
+          </p:cNvPr>
+          <p:cNvSpPr txBox="1"/>
+          <p:nvPr/>
+        </p:nvSpPr>
+        <p:spPr>
+          <a:xfrm>
+            <a:off x="9617343" y="6338473"/>
+            <a:ext cx="2275687" cy="369332"/>
+          </a:xfrm>
+          <a:prstGeom prst="rect">
+            <a:avLst/>
+          </a:prstGeom>
+          <a:noFill/>
+        </p:spPr>
+        <p:txBody>
+          <a:bodyPr wrap="square" rtlCol="0">
+            <a:spAutoFit/>
+          </a:bodyPr>
+          <a:lstStyle/>
+          <a:p>
+            <a:pPr algn="ctr"/>
+            <a:r>
+              <a:rPr lang="da-DK" dirty="0"/>
+              <a:t>presentation1A.qmd</a:t>
+            </a:r>
+          </a:p>
+        </p:txBody>
+      </p:sp>
+      <p:pic>
+        <p:nvPicPr>
+          <p:cNvPr id="84" name="Grafik 83" descr="Papir kontur">
+            <a:extLst>
+              <a:ext uri="{FF2B5EF4-FFF2-40B4-BE49-F238E27FC236}">
+                <a16:creationId xmlns:a16="http://schemas.microsoft.com/office/drawing/2014/main" id="{EC12AB94-226E-218B-9F8C-14D924713172}"/>
+              </a:ext>
+            </a:extLst>
+          </p:cNvPr>
+          <p:cNvPicPr>
+            <a:picLocks noChangeAspect="1"/>
+          </p:cNvPicPr>
+          <p:nvPr/>
+        </p:nvPicPr>
+        <p:blipFill>
+          <a:blip r:embed="rId5">
+            <a:extLst>
+              <a:ext uri="{96DAC541-7B7A-43D3-8B79-37D633B846F1}">
+                <asvg:svgBlip xmlns:asvg="http://schemas.microsoft.com/office/drawing/2016/SVG/main" r:embed="rId6"/>
+              </a:ext>
+            </a:extLst>
+          </a:blip>
+          <a:stretch>
+            <a:fillRect/>
+          </a:stretch>
+        </p:blipFill>
+        <p:spPr>
+          <a:xfrm>
+            <a:off x="10188496" y="5237061"/>
+            <a:ext cx="1133383" cy="1133383"/>
+          </a:xfrm>
+          <a:prstGeom prst="rect">
+            <a:avLst/>
+          </a:prstGeom>
+        </p:spPr>
+      </p:pic>
+      <p:sp>
+        <p:nvSpPr>
+          <p:cNvPr id="85" name="Tekstfelt 84">
+            <a:extLst>
+              <a:ext uri="{FF2B5EF4-FFF2-40B4-BE49-F238E27FC236}">
+                <a16:creationId xmlns:a16="http://schemas.microsoft.com/office/drawing/2014/main" id="{910A30ED-DC26-C87F-9DFE-45EEEB7162C4}"/>
+              </a:ext>
+            </a:extLst>
+          </p:cNvPr>
+          <p:cNvSpPr txBox="1"/>
+          <p:nvPr/>
+        </p:nvSpPr>
+        <p:spPr>
+          <a:xfrm>
+            <a:off x="1227790" y="6295715"/>
+            <a:ext cx="1734065" cy="369332"/>
+          </a:xfrm>
+          <a:prstGeom prst="rect">
+            <a:avLst/>
+          </a:prstGeom>
+          <a:noFill/>
+        </p:spPr>
+        <p:txBody>
+          <a:bodyPr wrap="square" rtlCol="0">
+            <a:spAutoFit/>
+          </a:bodyPr>
+          <a:lstStyle/>
+          <a:p>
+            <a:pPr algn="ctr"/>
+            <a:r>
+              <a:rPr lang="da-DK" dirty="0"/>
+              <a:t>[…].</a:t>
+            </a:r>
+            <a:r>
+              <a:rPr lang="da-DK" dirty="0" err="1"/>
+              <a:t>xlsx</a:t>
+            </a:r>
+            <a:endParaRPr lang="da-DK" dirty="0"/>
+          </a:p>
+        </p:txBody>
+      </p:sp>
       <p:cxnSp>
         <p:nvCxnSpPr>
-          <p:cNvPr id="78" name="Lige forbindelse 77">
-            <a:extLst>
-              <a:ext uri="{FF2B5EF4-FFF2-40B4-BE49-F238E27FC236}">
-                <a16:creationId xmlns:a16="http://schemas.microsoft.com/office/drawing/2014/main" id="{E60969D2-AF24-2D0A-08C5-6E26EB6370A9}"/>
+          <p:cNvPr id="2" name="Lige forbindelse 1">
+            <a:extLst>
+              <a:ext uri="{FF2B5EF4-FFF2-40B4-BE49-F238E27FC236}">
+                <a16:creationId xmlns:a16="http://schemas.microsoft.com/office/drawing/2014/main" id="{49C08A63-2EAD-EE10-AE87-46097EEF53AF}"/>
               </a:ext>
             </a:extLst>
           </p:cNvPr>
@@ -4555,9 +4673,9 @@
           <p:nvPr/>
         </p:nvCxnSpPr>
         <p:spPr>
-          <a:xfrm>
-            <a:off x="9836343" y="4202380"/>
-            <a:ext cx="0" cy="1002577"/>
+          <a:xfrm flipH="1">
+            <a:off x="9854453" y="4170409"/>
+            <a:ext cx="2055" cy="499074"/>
           </a:xfrm>
           <a:prstGeom prst="line">
             <a:avLst/>
@@ -4578,12 +4696,126 @@
           </a:fontRef>
         </p:style>
       </p:cxnSp>
-      <p:sp>
-        <p:nvSpPr>
-          <p:cNvPr id="80" name="Tekstfelt 79">
-            <a:extLst>
-              <a:ext uri="{FF2B5EF4-FFF2-40B4-BE49-F238E27FC236}">
-                <a16:creationId xmlns:a16="http://schemas.microsoft.com/office/drawing/2014/main" id="{4F317280-E151-1330-C016-4BCD5092B0AE}"/>
+      <p:cxnSp>
+        <p:nvCxnSpPr>
+          <p:cNvPr id="3" name="Lige forbindelse 2">
+            <a:extLst>
+              <a:ext uri="{FF2B5EF4-FFF2-40B4-BE49-F238E27FC236}">
+                <a16:creationId xmlns:a16="http://schemas.microsoft.com/office/drawing/2014/main" id="{6E467A60-E94F-B25E-77A3-AD86CF71CCDE}"/>
+              </a:ext>
+            </a:extLst>
+          </p:cNvPr>
+          <p:cNvCxnSpPr>
+            <a:cxnSpLocks/>
+          </p:cNvCxnSpPr>
+          <p:nvPr/>
+        </p:nvCxnSpPr>
+        <p:spPr>
+          <a:xfrm flipH="1">
+            <a:off x="9008979" y="4656899"/>
+            <a:ext cx="1588522" cy="0"/>
+          </a:xfrm>
+          <a:prstGeom prst="line">
+            <a:avLst/>
+          </a:prstGeom>
+        </p:spPr>
+        <p:style>
+          <a:lnRef idx="2">
+            <a:schemeClr val="dk1"/>
+          </a:lnRef>
+          <a:fillRef idx="0">
+            <a:schemeClr val="dk1"/>
+          </a:fillRef>
+          <a:effectRef idx="1">
+            <a:schemeClr val="dk1"/>
+          </a:effectRef>
+          <a:fontRef idx="minor">
+            <a:schemeClr val="tx1"/>
+          </a:fontRef>
+        </p:style>
+      </p:cxnSp>
+      <p:cxnSp>
+        <p:nvCxnSpPr>
+          <p:cNvPr id="4" name="Lige forbindelse 3">
+            <a:extLst>
+              <a:ext uri="{FF2B5EF4-FFF2-40B4-BE49-F238E27FC236}">
+                <a16:creationId xmlns:a16="http://schemas.microsoft.com/office/drawing/2014/main" id="{E86C5BD8-785D-DA3E-B246-6746E85C10D4}"/>
+              </a:ext>
+            </a:extLst>
+          </p:cNvPr>
+          <p:cNvCxnSpPr>
+            <a:cxnSpLocks/>
+          </p:cNvCxnSpPr>
+          <p:nvPr/>
+        </p:nvCxnSpPr>
+        <p:spPr>
+          <a:xfrm flipH="1">
+            <a:off x="10584245" y="4656899"/>
+            <a:ext cx="2055" cy="499074"/>
+          </a:xfrm>
+          <a:prstGeom prst="line">
+            <a:avLst/>
+          </a:prstGeom>
+        </p:spPr>
+        <p:style>
+          <a:lnRef idx="2">
+            <a:schemeClr val="dk1"/>
+          </a:lnRef>
+          <a:fillRef idx="0">
+            <a:schemeClr val="dk1"/>
+          </a:fillRef>
+          <a:effectRef idx="1">
+            <a:schemeClr val="dk1"/>
+          </a:effectRef>
+          <a:fontRef idx="minor">
+            <a:schemeClr val="tx1"/>
+          </a:fontRef>
+        </p:style>
+      </p:cxnSp>
+      <p:cxnSp>
+        <p:nvCxnSpPr>
+          <p:cNvPr id="5" name="Lige forbindelse 4">
+            <a:extLst>
+              <a:ext uri="{FF2B5EF4-FFF2-40B4-BE49-F238E27FC236}">
+                <a16:creationId xmlns:a16="http://schemas.microsoft.com/office/drawing/2014/main" id="{420D07B4-1B15-5C57-CB73-646F0857F642}"/>
+              </a:ext>
+            </a:extLst>
+          </p:cNvPr>
+          <p:cNvCxnSpPr>
+            <a:cxnSpLocks/>
+          </p:cNvCxnSpPr>
+          <p:nvPr/>
+        </p:nvCxnSpPr>
+        <p:spPr>
+          <a:xfrm flipH="1">
+            <a:off x="9023430" y="4656899"/>
+            <a:ext cx="2055" cy="499074"/>
+          </a:xfrm>
+          <a:prstGeom prst="line">
+            <a:avLst/>
+          </a:prstGeom>
+        </p:spPr>
+        <p:style>
+          <a:lnRef idx="2">
+            <a:schemeClr val="dk1"/>
+          </a:lnRef>
+          <a:fillRef idx="0">
+            <a:schemeClr val="dk1"/>
+          </a:fillRef>
+          <a:effectRef idx="1">
+            <a:schemeClr val="dk1"/>
+          </a:effectRef>
+          <a:fontRef idx="minor">
+            <a:schemeClr val="tx1"/>
+          </a:fontRef>
+        </p:style>
+      </p:cxnSp>
+      <p:sp>
+        <p:nvSpPr>
+          <p:cNvPr id="6" name="Tekstfelt 5">
+            <a:extLst>
+              <a:ext uri="{FF2B5EF4-FFF2-40B4-BE49-F238E27FC236}">
+                <a16:creationId xmlns:a16="http://schemas.microsoft.com/office/drawing/2014/main" id="{7EF037EA-A9CC-BC20-7254-3F5A076C566F}"/>
               </a:ext>
             </a:extLst>
           </p:cNvPr>
@@ -4592,8 +4824,8 @@
         </p:nvSpPr>
         <p:spPr>
           <a:xfrm>
-            <a:off x="8776626" y="6341056"/>
-            <a:ext cx="2106805" cy="369332"/>
+            <a:off x="7908348" y="6338473"/>
+            <a:ext cx="2275687" cy="369332"/>
           </a:xfrm>
           <a:prstGeom prst="rect">
             <a:avLst/>
@@ -4609,17 +4841,17 @@
             <a:pPr algn="ctr"/>
             <a:r>
               <a:rPr lang="da-DK" dirty="0"/>
-              <a:t>presentation0.qmd</a:t>
+              <a:t>…</a:t>
             </a:r>
           </a:p>
         </p:txBody>
       </p:sp>
       <p:pic>
         <p:nvPicPr>
-          <p:cNvPr id="84" name="Grafik 83" descr="Papir kontur">
-            <a:extLst>
-              <a:ext uri="{FF2B5EF4-FFF2-40B4-BE49-F238E27FC236}">
-                <a16:creationId xmlns:a16="http://schemas.microsoft.com/office/drawing/2014/main" id="{EC12AB94-226E-218B-9F8C-14D924713172}"/>
+          <p:cNvPr id="7" name="Grafik 6" descr="Papir kontur">
+            <a:extLst>
+              <a:ext uri="{FF2B5EF4-FFF2-40B4-BE49-F238E27FC236}">
+                <a16:creationId xmlns:a16="http://schemas.microsoft.com/office/drawing/2014/main" id="{050563CA-9D05-66B1-5CEC-61060C1BF59C}"/>
               </a:ext>
             </a:extLst>
           </p:cNvPr>
@@ -4642,7 +4874,7 @@
         </p:blipFill>
         <p:spPr>
           <a:xfrm>
-            <a:off x="9294841" y="5239644"/>
+            <a:off x="8479501" y="5237061"/>
             <a:ext cx="1133383" cy="1133383"/>
           </a:xfrm>
           <a:prstGeom prst="rect">
@@ -4650,47 +4882,6 @@
           </a:prstGeom>
         </p:spPr>
       </p:pic>
-      <p:sp>
-        <p:nvSpPr>
-          <p:cNvPr id="85" name="Tekstfelt 84">
-            <a:extLst>
-              <a:ext uri="{FF2B5EF4-FFF2-40B4-BE49-F238E27FC236}">
-                <a16:creationId xmlns:a16="http://schemas.microsoft.com/office/drawing/2014/main" id="{910A30ED-DC26-C87F-9DFE-45EEEB7162C4}"/>
-              </a:ext>
-            </a:extLst>
-          </p:cNvPr>
-          <p:cNvSpPr txBox="1"/>
-          <p:nvPr/>
-        </p:nvSpPr>
-        <p:spPr>
-          <a:xfrm>
-            <a:off x="1227790" y="6295715"/>
-            <a:ext cx="1734065" cy="369332"/>
-          </a:xfrm>
-          <a:prstGeom prst="rect">
-            <a:avLst/>
-          </a:prstGeom>
-          <a:noFill/>
-        </p:spPr>
-        <p:txBody>
-          <a:bodyPr wrap="square" rtlCol="0">
-            <a:spAutoFit/>
-          </a:bodyPr>
-          <a:lstStyle/>
-          <a:p>
-            <a:pPr algn="ctr"/>
-            <a:r>
-              <a:rPr lang="da-DK" dirty="0"/>
-              <a:t>[…].</a:t>
-            </a:r>
-            <a:r>
-              <a:rPr lang="da-DK" dirty="0" err="1"/>
-              <a:t>xlsx</a:t>
-            </a:r>
-            <a:endParaRPr lang="da-DK" dirty="0"/>
-          </a:p>
-        </p:txBody>
-      </p:sp>
     </p:spTree>
     <p:extLst>
       <p:ext uri="{BB962C8B-B14F-4D97-AF65-F5344CB8AC3E}">

--- a/Teachers/Figures/make_figures.pptx
+++ b/Teachers/Figures/make_figures.pptx
@@ -5,11 +5,12 @@
     <p:sldMasterId id="2147483648" r:id="rId1"/>
   </p:sldMasterIdLst>
   <p:notesMasterIdLst>
-    <p:notesMasterId r:id="rId4"/>
+    <p:notesMasterId r:id="rId5"/>
   </p:notesMasterIdLst>
   <p:sldIdLst>
     <p:sldId id="256" r:id="rId2"/>
     <p:sldId id="257" r:id="rId3"/>
+    <p:sldId id="258" r:id="rId4"/>
   </p:sldIdLst>
   <p:sldSz cx="12192000" cy="6858000"/>
   <p:notesSz cx="6858000" cy="9144000"/>
@@ -198,7 +199,7 @@
           <a:p>
             <a:fld id="{B3F190BB-0568-5849-97E9-7CC984FEB8A5}" type="datetimeFigureOut">
               <a:rPr lang="da-DK" smtClean="0"/>
-              <a:t>27.03.2025</a:t>
+              <a:t>03.04.2025</a:t>
             </a:fld>
             <a:endParaRPr lang="da-DK"/>
           </a:p>
@@ -549,6 +550,114 @@
 </p:notes>
 </file>
 
+<file path=ppt/notesSlides/notesSlide2.xml><?xml version="1.0" encoding="utf-8"?>
+<p:notes xmlns:a="http://schemas.openxmlformats.org/drawingml/2006/main" xmlns:r="http://schemas.openxmlformats.org/officeDocument/2006/relationships" xmlns:p="http://schemas.openxmlformats.org/presentationml/2006/main">
+  <p:cSld>
+    <p:spTree>
+      <p:nvGrpSpPr>
+        <p:cNvPr id="1" name="">
+          <a:extLst>
+            <a:ext uri="{FF2B5EF4-FFF2-40B4-BE49-F238E27FC236}">
+              <a16:creationId xmlns:a16="http://schemas.microsoft.com/office/drawing/2014/main" id="{3AB255D4-FBB7-2E2A-9261-0F62CE1C1846}"/>
+            </a:ext>
+          </a:extLst>
+        </p:cNvPr>
+        <p:cNvGrpSpPr/>
+        <p:nvPr/>
+      </p:nvGrpSpPr>
+      <p:grpSpPr>
+        <a:xfrm>
+          <a:off x="0" y="0"/>
+          <a:ext cx="0" cy="0"/>
+          <a:chOff x="0" y="0"/>
+          <a:chExt cx="0" cy="0"/>
+        </a:xfrm>
+      </p:grpSpPr>
+      <p:sp>
+        <p:nvSpPr>
+          <p:cNvPr id="2" name="Pladsholder til slidebillede 1">
+            <a:extLst>
+              <a:ext uri="{FF2B5EF4-FFF2-40B4-BE49-F238E27FC236}">
+                <a16:creationId xmlns:a16="http://schemas.microsoft.com/office/drawing/2014/main" id="{ECBE2056-8916-4EC2-BA08-623BF96ADF5A}"/>
+              </a:ext>
+            </a:extLst>
+          </p:cNvPr>
+          <p:cNvSpPr>
+            <a:spLocks noGrp="1" noRot="1" noChangeAspect="1"/>
+          </p:cNvSpPr>
+          <p:nvPr>
+            <p:ph type="sldImg"/>
+          </p:nvPr>
+        </p:nvSpPr>
+        <p:spPr/>
+      </p:sp>
+      <p:sp>
+        <p:nvSpPr>
+          <p:cNvPr id="3" name="Pladsholder til noter 2">
+            <a:extLst>
+              <a:ext uri="{FF2B5EF4-FFF2-40B4-BE49-F238E27FC236}">
+                <a16:creationId xmlns:a16="http://schemas.microsoft.com/office/drawing/2014/main" id="{0CA0D5D2-33B2-86E2-1474-1B93858EED59}"/>
+              </a:ext>
+            </a:extLst>
+          </p:cNvPr>
+          <p:cNvSpPr>
+            <a:spLocks noGrp="1"/>
+          </p:cNvSpPr>
+          <p:nvPr>
+            <p:ph type="body" idx="1"/>
+          </p:nvPr>
+        </p:nvSpPr>
+        <p:spPr/>
+        <p:txBody>
+          <a:bodyPr/>
+          <a:lstStyle/>
+          <a:p>
+            <a:endParaRPr lang="da-DK" dirty="0"/>
+          </a:p>
+        </p:txBody>
+      </p:sp>
+      <p:sp>
+        <p:nvSpPr>
+          <p:cNvPr id="4" name="Pladsholder til slidenummer 3">
+            <a:extLst>
+              <a:ext uri="{FF2B5EF4-FFF2-40B4-BE49-F238E27FC236}">
+                <a16:creationId xmlns:a16="http://schemas.microsoft.com/office/drawing/2014/main" id="{39AFBF78-D2B8-D419-3CA6-65BE83F338FB}"/>
+              </a:ext>
+            </a:extLst>
+          </p:cNvPr>
+          <p:cNvSpPr>
+            <a:spLocks noGrp="1"/>
+          </p:cNvSpPr>
+          <p:nvPr>
+            <p:ph type="sldNum" sz="quarter" idx="5"/>
+          </p:nvPr>
+        </p:nvSpPr>
+        <p:spPr/>
+        <p:txBody>
+          <a:bodyPr/>
+          <a:lstStyle/>
+          <a:p>
+            <a:fld id="{6F26A5D8-99E8-394D-BD4F-AB5771DC437A}" type="slidenum">
+              <a:rPr lang="da-DK" smtClean="0"/>
+              <a:t>3</a:t>
+            </a:fld>
+            <a:endParaRPr lang="da-DK"/>
+          </a:p>
+        </p:txBody>
+      </p:sp>
+    </p:spTree>
+    <p:extLst>
+      <p:ext uri="{BB962C8B-B14F-4D97-AF65-F5344CB8AC3E}">
+        <p14:creationId xmlns:p14="http://schemas.microsoft.com/office/powerpoint/2010/main" val="3364897591"/>
+      </p:ext>
+    </p:extLst>
+  </p:cSld>
+  <p:clrMapOvr>
+    <a:masterClrMapping/>
+  </p:clrMapOvr>
+</p:notes>
+</file>
+
 <file path=ppt/slideLayouts/slideLayout1.xml><?xml version="1.0" encoding="utf-8"?>
 <p:sldLayout xmlns:a="http://schemas.openxmlformats.org/drawingml/2006/main" xmlns:r="http://schemas.openxmlformats.org/officeDocument/2006/relationships" xmlns:p="http://schemas.openxmlformats.org/presentationml/2006/main" type="title" preserve="1">
   <p:cSld name="Titelslide">
@@ -696,7 +805,7 @@
           <a:p>
             <a:fld id="{24B4D684-1A4E-3A4C-BB71-BA4209553AB4}" type="datetimeFigureOut">
               <a:rPr lang="da-DK" smtClean="0"/>
-              <a:t>27.03.2025</a:t>
+              <a:t>03.04.2025</a:t>
             </a:fld>
             <a:endParaRPr lang="da-DK"/>
           </a:p>
@@ -894,7 +1003,7 @@
           <a:p>
             <a:fld id="{24B4D684-1A4E-3A4C-BB71-BA4209553AB4}" type="datetimeFigureOut">
               <a:rPr lang="da-DK" smtClean="0"/>
-              <a:t>27.03.2025</a:t>
+              <a:t>03.04.2025</a:t>
             </a:fld>
             <a:endParaRPr lang="da-DK"/>
           </a:p>
@@ -1102,7 +1211,7 @@
           <a:p>
             <a:fld id="{24B4D684-1A4E-3A4C-BB71-BA4209553AB4}" type="datetimeFigureOut">
               <a:rPr lang="da-DK" smtClean="0"/>
-              <a:t>27.03.2025</a:t>
+              <a:t>03.04.2025</a:t>
             </a:fld>
             <a:endParaRPr lang="da-DK"/>
           </a:p>
@@ -1300,7 +1409,7 @@
           <a:p>
             <a:fld id="{24B4D684-1A4E-3A4C-BB71-BA4209553AB4}" type="datetimeFigureOut">
               <a:rPr lang="da-DK" smtClean="0"/>
-              <a:t>27.03.2025</a:t>
+              <a:t>03.04.2025</a:t>
             </a:fld>
             <a:endParaRPr lang="da-DK"/>
           </a:p>
@@ -1575,7 +1684,7 @@
           <a:p>
             <a:fld id="{24B4D684-1A4E-3A4C-BB71-BA4209553AB4}" type="datetimeFigureOut">
               <a:rPr lang="da-DK" smtClean="0"/>
-              <a:t>27.03.2025</a:t>
+              <a:t>03.04.2025</a:t>
             </a:fld>
             <a:endParaRPr lang="da-DK"/>
           </a:p>
@@ -1840,7 +1949,7 @@
           <a:p>
             <a:fld id="{24B4D684-1A4E-3A4C-BB71-BA4209553AB4}" type="datetimeFigureOut">
               <a:rPr lang="da-DK" smtClean="0"/>
-              <a:t>27.03.2025</a:t>
+              <a:t>03.04.2025</a:t>
             </a:fld>
             <a:endParaRPr lang="da-DK"/>
           </a:p>
@@ -2252,7 +2361,7 @@
           <a:p>
             <a:fld id="{24B4D684-1A4E-3A4C-BB71-BA4209553AB4}" type="datetimeFigureOut">
               <a:rPr lang="da-DK" smtClean="0"/>
-              <a:t>27.03.2025</a:t>
+              <a:t>03.04.2025</a:t>
             </a:fld>
             <a:endParaRPr lang="da-DK"/>
           </a:p>
@@ -2393,7 +2502,7 @@
           <a:p>
             <a:fld id="{24B4D684-1A4E-3A4C-BB71-BA4209553AB4}" type="datetimeFigureOut">
               <a:rPr lang="da-DK" smtClean="0"/>
-              <a:t>27.03.2025</a:t>
+              <a:t>03.04.2025</a:t>
             </a:fld>
             <a:endParaRPr lang="da-DK"/>
           </a:p>
@@ -2506,7 +2615,7 @@
           <a:p>
             <a:fld id="{24B4D684-1A4E-3A4C-BB71-BA4209553AB4}" type="datetimeFigureOut">
               <a:rPr lang="da-DK" smtClean="0"/>
-              <a:t>27.03.2025</a:t>
+              <a:t>03.04.2025</a:t>
             </a:fld>
             <a:endParaRPr lang="da-DK"/>
           </a:p>
@@ -2817,7 +2926,7 @@
           <a:p>
             <a:fld id="{24B4D684-1A4E-3A4C-BB71-BA4209553AB4}" type="datetimeFigureOut">
               <a:rPr lang="da-DK" smtClean="0"/>
-              <a:t>27.03.2025</a:t>
+              <a:t>03.04.2025</a:t>
             </a:fld>
             <a:endParaRPr lang="da-DK"/>
           </a:p>
@@ -3105,7 +3214,7 @@
           <a:p>
             <a:fld id="{24B4D684-1A4E-3A4C-BB71-BA4209553AB4}" type="datetimeFigureOut">
               <a:rPr lang="da-DK" smtClean="0"/>
-              <a:t>27.03.2025</a:t>
+              <a:t>03.04.2025</a:t>
             </a:fld>
             <a:endParaRPr lang="da-DK"/>
           </a:p>
@@ -3346,7 +3455,7 @@
           <a:p>
             <a:fld id="{24B4D684-1A4E-3A4C-BB71-BA4209553AB4}" type="datetimeFigureOut">
               <a:rPr lang="da-DK" smtClean="0"/>
-              <a:t>27.03.2025</a:t>
+              <a:t>03.04.2025</a:t>
             </a:fld>
             <a:endParaRPr lang="da-DK"/>
           </a:p>
@@ -4886,6 +4995,1653 @@
     <p:extLst>
       <p:ext uri="{BB962C8B-B14F-4D97-AF65-F5344CB8AC3E}">
         <p14:creationId xmlns:p14="http://schemas.microsoft.com/office/powerpoint/2010/main" val="153874914"/>
+      </p:ext>
+    </p:extLst>
+  </p:cSld>
+  <p:clrMapOvr>
+    <a:masterClrMapping/>
+  </p:clrMapOvr>
+</p:sld>
+</file>
+
+<file path=ppt/slides/slide3.xml><?xml version="1.0" encoding="utf-8"?>
+<p:sld xmlns:a="http://schemas.openxmlformats.org/drawingml/2006/main" xmlns:r="http://schemas.openxmlformats.org/officeDocument/2006/relationships" xmlns:p="http://schemas.openxmlformats.org/presentationml/2006/main">
+  <p:cSld>
+    <p:spTree>
+      <p:nvGrpSpPr>
+        <p:cNvPr id="1" name="">
+          <a:extLst>
+            <a:ext uri="{FF2B5EF4-FFF2-40B4-BE49-F238E27FC236}">
+              <a16:creationId xmlns:a16="http://schemas.microsoft.com/office/drawing/2014/main" id="{8607C1D1-3876-2A29-12DC-27F8295B6B9E}"/>
+            </a:ext>
+          </a:extLst>
+        </p:cNvPr>
+        <p:cNvGrpSpPr/>
+        <p:nvPr/>
+      </p:nvGrpSpPr>
+      <p:grpSpPr>
+        <a:xfrm>
+          <a:off x="0" y="0"/>
+          <a:ext cx="0" cy="0"/>
+          <a:chOff x="0" y="0"/>
+          <a:chExt cx="0" cy="0"/>
+        </a:xfrm>
+      </p:grpSpPr>
+      <p:pic>
+        <p:nvPicPr>
+          <p:cNvPr id="11" name="Grafik 10" descr="Mappe kontur">
+            <a:extLst>
+              <a:ext uri="{FF2B5EF4-FFF2-40B4-BE49-F238E27FC236}">
+                <a16:creationId xmlns:a16="http://schemas.microsoft.com/office/drawing/2014/main" id="{FBDF1406-E928-8F10-74B8-531957348556}"/>
+              </a:ext>
+            </a:extLst>
+          </p:cNvPr>
+          <p:cNvPicPr>
+            <a:picLocks noChangeAspect="1"/>
+          </p:cNvPicPr>
+          <p:nvPr/>
+        </p:nvPicPr>
+        <p:blipFill>
+          <a:blip r:embed="rId3">
+            <a:extLst>
+              <a:ext uri="{96DAC541-7B7A-43D3-8B79-37D633B846F1}">
+                <asvg:svgBlip xmlns:asvg="http://schemas.microsoft.com/office/drawing/2016/SVG/main" r:embed="rId4"/>
+              </a:ext>
+            </a:extLst>
+          </a:blip>
+          <a:stretch>
+            <a:fillRect/>
+          </a:stretch>
+        </p:blipFill>
+        <p:spPr>
+          <a:xfrm>
+            <a:off x="5315463" y="0"/>
+            <a:ext cx="1466335" cy="1466335"/>
+          </a:xfrm>
+          <a:prstGeom prst="rect">
+            <a:avLst/>
+          </a:prstGeom>
+        </p:spPr>
+      </p:pic>
+      <p:sp>
+        <p:nvSpPr>
+          <p:cNvPr id="12" name="Tekstfelt 11">
+            <a:extLst>
+              <a:ext uri="{FF2B5EF4-FFF2-40B4-BE49-F238E27FC236}">
+                <a16:creationId xmlns:a16="http://schemas.microsoft.com/office/drawing/2014/main" id="{CCBFE041-B191-1497-2F5C-58816310F5AF}"/>
+              </a:ext>
+            </a:extLst>
+          </p:cNvPr>
+          <p:cNvSpPr txBox="1"/>
+          <p:nvPr/>
+        </p:nvSpPr>
+        <p:spPr>
+          <a:xfrm>
+            <a:off x="5181597" y="1235676"/>
+            <a:ext cx="1734065" cy="369332"/>
+          </a:xfrm>
+          <a:prstGeom prst="rect">
+            <a:avLst/>
+          </a:prstGeom>
+          <a:noFill/>
+        </p:spPr>
+        <p:txBody>
+          <a:bodyPr wrap="square" rtlCol="0">
+            <a:spAutoFit/>
+          </a:bodyPr>
+          <a:lstStyle/>
+          <a:p>
+            <a:pPr algn="ctr"/>
+            <a:r>
+              <a:rPr lang="da-DK" dirty="0" err="1"/>
+              <a:t>FromExceltoR</a:t>
+            </a:r>
+            <a:endParaRPr lang="da-DK" dirty="0"/>
+          </a:p>
+        </p:txBody>
+      </p:sp>
+      <p:pic>
+        <p:nvPicPr>
+          <p:cNvPr id="13" name="Grafik 12" descr="Mappe kontur">
+            <a:extLst>
+              <a:ext uri="{FF2B5EF4-FFF2-40B4-BE49-F238E27FC236}">
+                <a16:creationId xmlns:a16="http://schemas.microsoft.com/office/drawing/2014/main" id="{DB89EF16-694D-A71E-6D39-8AD6E523A217}"/>
+              </a:ext>
+            </a:extLst>
+          </p:cNvPr>
+          <p:cNvPicPr>
+            <a:picLocks noChangeAspect="1"/>
+          </p:cNvPicPr>
+          <p:nvPr/>
+        </p:nvPicPr>
+        <p:blipFill>
+          <a:blip r:embed="rId3">
+            <a:extLst>
+              <a:ext uri="{96DAC541-7B7A-43D3-8B79-37D633B846F1}">
+                <asvg:svgBlip xmlns:asvg="http://schemas.microsoft.com/office/drawing/2016/SVG/main" r:embed="rId4"/>
+              </a:ext>
+            </a:extLst>
+          </a:blip>
+          <a:stretch>
+            <a:fillRect/>
+          </a:stretch>
+        </p:blipFill>
+        <p:spPr>
+          <a:xfrm>
+            <a:off x="1979814" y="2565401"/>
+            <a:ext cx="1466335" cy="1466335"/>
+          </a:xfrm>
+          <a:prstGeom prst="rect">
+            <a:avLst/>
+          </a:prstGeom>
+        </p:spPr>
+      </p:pic>
+      <p:sp>
+        <p:nvSpPr>
+          <p:cNvPr id="14" name="Tekstfelt 13">
+            <a:extLst>
+              <a:ext uri="{FF2B5EF4-FFF2-40B4-BE49-F238E27FC236}">
+                <a16:creationId xmlns:a16="http://schemas.microsoft.com/office/drawing/2014/main" id="{999906E1-37A4-74AB-B938-E0C5CB5035B4}"/>
+              </a:ext>
+            </a:extLst>
+          </p:cNvPr>
+          <p:cNvSpPr txBox="1"/>
+          <p:nvPr/>
+        </p:nvSpPr>
+        <p:spPr>
+          <a:xfrm>
+            <a:off x="1845948" y="3801077"/>
+            <a:ext cx="1734065" cy="369332"/>
+          </a:xfrm>
+          <a:prstGeom prst="rect">
+            <a:avLst/>
+          </a:prstGeom>
+          <a:noFill/>
+        </p:spPr>
+        <p:txBody>
+          <a:bodyPr wrap="square" rtlCol="0">
+            <a:spAutoFit/>
+          </a:bodyPr>
+          <a:lstStyle/>
+          <a:p>
+            <a:pPr algn="ctr"/>
+            <a:r>
+              <a:rPr lang="da-DK" dirty="0"/>
+              <a:t>Data</a:t>
+            </a:r>
+          </a:p>
+        </p:txBody>
+      </p:sp>
+      <p:cxnSp>
+        <p:nvCxnSpPr>
+          <p:cNvPr id="16" name="Lige forbindelse 15">
+            <a:extLst>
+              <a:ext uri="{FF2B5EF4-FFF2-40B4-BE49-F238E27FC236}">
+                <a16:creationId xmlns:a16="http://schemas.microsoft.com/office/drawing/2014/main" id="{C788104E-BADD-7B26-38BE-D28BED100D21}"/>
+              </a:ext>
+            </a:extLst>
+          </p:cNvPr>
+          <p:cNvCxnSpPr>
+            <a:cxnSpLocks/>
+          </p:cNvCxnSpPr>
+          <p:nvPr/>
+        </p:nvCxnSpPr>
+        <p:spPr>
+          <a:xfrm>
+            <a:off x="6098055" y="1626288"/>
+            <a:ext cx="0" cy="985658"/>
+          </a:xfrm>
+          <a:prstGeom prst="line">
+            <a:avLst/>
+          </a:prstGeom>
+        </p:spPr>
+        <p:style>
+          <a:lnRef idx="2">
+            <a:schemeClr val="dk1"/>
+          </a:lnRef>
+          <a:fillRef idx="0">
+            <a:schemeClr val="dk1"/>
+          </a:fillRef>
+          <a:effectRef idx="1">
+            <a:schemeClr val="dk1"/>
+          </a:effectRef>
+          <a:fontRef idx="minor">
+            <a:schemeClr val="tx1"/>
+          </a:fontRef>
+        </p:style>
+      </p:cxnSp>
+      <p:pic>
+        <p:nvPicPr>
+          <p:cNvPr id="25" name="Grafik 24" descr="Mappe kontur">
+            <a:extLst>
+              <a:ext uri="{FF2B5EF4-FFF2-40B4-BE49-F238E27FC236}">
+                <a16:creationId xmlns:a16="http://schemas.microsoft.com/office/drawing/2014/main" id="{E65FFC9D-0021-A7BF-B112-9B2DD1921B98}"/>
+              </a:ext>
+            </a:extLst>
+          </p:cNvPr>
+          <p:cNvPicPr>
+            <a:picLocks noChangeAspect="1"/>
+          </p:cNvPicPr>
+          <p:nvPr/>
+        </p:nvPicPr>
+        <p:blipFill>
+          <a:blip r:embed="rId3">
+            <a:extLst>
+              <a:ext uri="{96DAC541-7B7A-43D3-8B79-37D633B846F1}">
+                <asvg:svgBlip xmlns:asvg="http://schemas.microsoft.com/office/drawing/2016/SVG/main" r:embed="rId4"/>
+              </a:ext>
+            </a:extLst>
+          </a:blip>
+          <a:stretch>
+            <a:fillRect/>
+          </a:stretch>
+        </p:blipFill>
+        <p:spPr>
+          <a:xfrm>
+            <a:off x="5364885" y="2565401"/>
+            <a:ext cx="1466335" cy="1466335"/>
+          </a:xfrm>
+          <a:prstGeom prst="rect">
+            <a:avLst/>
+          </a:prstGeom>
+        </p:spPr>
+      </p:pic>
+      <p:sp>
+        <p:nvSpPr>
+          <p:cNvPr id="26" name="Tekstfelt 25">
+            <a:extLst>
+              <a:ext uri="{FF2B5EF4-FFF2-40B4-BE49-F238E27FC236}">
+                <a16:creationId xmlns:a16="http://schemas.microsoft.com/office/drawing/2014/main" id="{44B46492-1549-8BF6-6A4C-117C3FED098C}"/>
+              </a:ext>
+            </a:extLst>
+          </p:cNvPr>
+          <p:cNvSpPr txBox="1"/>
+          <p:nvPr/>
+        </p:nvSpPr>
+        <p:spPr>
+          <a:xfrm>
+            <a:off x="5231019" y="3801077"/>
+            <a:ext cx="1734065" cy="369332"/>
+          </a:xfrm>
+          <a:prstGeom prst="rect">
+            <a:avLst/>
+          </a:prstGeom>
+          <a:noFill/>
+        </p:spPr>
+        <p:txBody>
+          <a:bodyPr wrap="square" rtlCol="0">
+            <a:spAutoFit/>
+          </a:bodyPr>
+          <a:lstStyle/>
+          <a:p>
+            <a:pPr algn="ctr"/>
+            <a:r>
+              <a:rPr lang="da-DK" dirty="0"/>
+              <a:t>Scripts</a:t>
+            </a:r>
+          </a:p>
+        </p:txBody>
+      </p:sp>
+      <p:pic>
+        <p:nvPicPr>
+          <p:cNvPr id="28" name="Grafik 27" descr="Mappe kontur">
+            <a:extLst>
+              <a:ext uri="{FF2B5EF4-FFF2-40B4-BE49-F238E27FC236}">
+                <a16:creationId xmlns:a16="http://schemas.microsoft.com/office/drawing/2014/main" id="{8B8BC75E-0762-553D-9768-82029C1FDBEA}"/>
+              </a:ext>
+            </a:extLst>
+          </p:cNvPr>
+          <p:cNvPicPr>
+            <a:picLocks noChangeAspect="1"/>
+          </p:cNvPicPr>
+          <p:nvPr/>
+        </p:nvPicPr>
+        <p:blipFill>
+          <a:blip r:embed="rId3">
+            <a:extLst>
+              <a:ext uri="{96DAC541-7B7A-43D3-8B79-37D633B846F1}">
+                <asvg:svgBlip xmlns:asvg="http://schemas.microsoft.com/office/drawing/2016/SVG/main" r:embed="rId4"/>
+              </a:ext>
+            </a:extLst>
+          </a:blip>
+          <a:stretch>
+            <a:fillRect/>
+          </a:stretch>
+        </p:blipFill>
+        <p:spPr>
+          <a:xfrm>
+            <a:off x="9131166" y="2537971"/>
+            <a:ext cx="1466335" cy="1466335"/>
+          </a:xfrm>
+          <a:prstGeom prst="rect">
+            <a:avLst/>
+          </a:prstGeom>
+        </p:spPr>
+      </p:pic>
+      <p:sp>
+        <p:nvSpPr>
+          <p:cNvPr id="29" name="Tekstfelt 28">
+            <a:extLst>
+              <a:ext uri="{FF2B5EF4-FFF2-40B4-BE49-F238E27FC236}">
+                <a16:creationId xmlns:a16="http://schemas.microsoft.com/office/drawing/2014/main" id="{B8D01B00-3B46-BB40-0044-0DF5EF4DC738}"/>
+              </a:ext>
+            </a:extLst>
+          </p:cNvPr>
+          <p:cNvSpPr txBox="1"/>
+          <p:nvPr/>
+        </p:nvSpPr>
+        <p:spPr>
+          <a:xfrm>
+            <a:off x="8997300" y="3773647"/>
+            <a:ext cx="1734065" cy="369332"/>
+          </a:xfrm>
+          <a:prstGeom prst="rect">
+            <a:avLst/>
+          </a:prstGeom>
+          <a:noFill/>
+        </p:spPr>
+        <p:txBody>
+          <a:bodyPr wrap="square" rtlCol="0">
+            <a:spAutoFit/>
+          </a:bodyPr>
+          <a:lstStyle/>
+          <a:p>
+            <a:pPr algn="ctr"/>
+            <a:r>
+              <a:rPr lang="da-DK" dirty="0"/>
+              <a:t>Presentations</a:t>
+            </a:r>
+          </a:p>
+        </p:txBody>
+      </p:sp>
+      <p:cxnSp>
+        <p:nvCxnSpPr>
+          <p:cNvPr id="31" name="Lige forbindelse 30">
+            <a:extLst>
+              <a:ext uri="{FF2B5EF4-FFF2-40B4-BE49-F238E27FC236}">
+                <a16:creationId xmlns:a16="http://schemas.microsoft.com/office/drawing/2014/main" id="{B65E69FB-0B89-A2B5-F525-DB184239333A}"/>
+              </a:ext>
+            </a:extLst>
+          </p:cNvPr>
+          <p:cNvCxnSpPr>
+            <a:cxnSpLocks/>
+          </p:cNvCxnSpPr>
+          <p:nvPr/>
+        </p:nvCxnSpPr>
+        <p:spPr>
+          <a:xfrm flipH="1">
+            <a:off x="2706817" y="2106571"/>
+            <a:ext cx="2055" cy="499074"/>
+          </a:xfrm>
+          <a:prstGeom prst="line">
+            <a:avLst/>
+          </a:prstGeom>
+        </p:spPr>
+        <p:style>
+          <a:lnRef idx="2">
+            <a:schemeClr val="dk1"/>
+          </a:lnRef>
+          <a:fillRef idx="0">
+            <a:schemeClr val="dk1"/>
+          </a:fillRef>
+          <a:effectRef idx="1">
+            <a:schemeClr val="dk1"/>
+          </a:effectRef>
+          <a:fontRef idx="minor">
+            <a:schemeClr val="tx1"/>
+          </a:fontRef>
+        </p:style>
+      </p:cxnSp>
+      <p:cxnSp>
+        <p:nvCxnSpPr>
+          <p:cNvPr id="34" name="Lige forbindelse 33">
+            <a:extLst>
+              <a:ext uri="{FF2B5EF4-FFF2-40B4-BE49-F238E27FC236}">
+                <a16:creationId xmlns:a16="http://schemas.microsoft.com/office/drawing/2014/main" id="{D7375C65-E06C-19F3-70AA-B52F2ADA7602}"/>
+              </a:ext>
+            </a:extLst>
+          </p:cNvPr>
+          <p:cNvCxnSpPr>
+            <a:cxnSpLocks/>
+          </p:cNvCxnSpPr>
+          <p:nvPr/>
+        </p:nvCxnSpPr>
+        <p:spPr>
+          <a:xfrm flipH="1">
+            <a:off x="2711414" y="2112872"/>
+            <a:ext cx="7150118" cy="0"/>
+          </a:xfrm>
+          <a:prstGeom prst="line">
+            <a:avLst/>
+          </a:prstGeom>
+        </p:spPr>
+        <p:style>
+          <a:lnRef idx="2">
+            <a:schemeClr val="dk1"/>
+          </a:lnRef>
+          <a:fillRef idx="0">
+            <a:schemeClr val="dk1"/>
+          </a:fillRef>
+          <a:effectRef idx="1">
+            <a:schemeClr val="dk1"/>
+          </a:effectRef>
+          <a:fontRef idx="minor">
+            <a:schemeClr val="tx1"/>
+          </a:fontRef>
+        </p:style>
+      </p:cxnSp>
+      <p:cxnSp>
+        <p:nvCxnSpPr>
+          <p:cNvPr id="35" name="Lige forbindelse 34">
+            <a:extLst>
+              <a:ext uri="{FF2B5EF4-FFF2-40B4-BE49-F238E27FC236}">
+                <a16:creationId xmlns:a16="http://schemas.microsoft.com/office/drawing/2014/main" id="{A59FDC69-4E83-E8AC-BF83-084749070FB7}"/>
+              </a:ext>
+            </a:extLst>
+          </p:cNvPr>
+          <p:cNvCxnSpPr>
+            <a:cxnSpLocks/>
+          </p:cNvCxnSpPr>
+          <p:nvPr/>
+        </p:nvCxnSpPr>
+        <p:spPr>
+          <a:xfrm flipH="1">
+            <a:off x="9861533" y="2107451"/>
+            <a:ext cx="2055" cy="499074"/>
+          </a:xfrm>
+          <a:prstGeom prst="line">
+            <a:avLst/>
+          </a:prstGeom>
+        </p:spPr>
+        <p:style>
+          <a:lnRef idx="2">
+            <a:schemeClr val="dk1"/>
+          </a:lnRef>
+          <a:fillRef idx="0">
+            <a:schemeClr val="dk1"/>
+          </a:fillRef>
+          <a:effectRef idx="1">
+            <a:schemeClr val="dk1"/>
+          </a:effectRef>
+          <a:fontRef idx="minor">
+            <a:schemeClr val="tx1"/>
+          </a:fontRef>
+        </p:style>
+      </p:cxnSp>
+      <p:cxnSp>
+        <p:nvCxnSpPr>
+          <p:cNvPr id="36" name="Lige forbindelse 35">
+            <a:extLst>
+              <a:ext uri="{FF2B5EF4-FFF2-40B4-BE49-F238E27FC236}">
+                <a16:creationId xmlns:a16="http://schemas.microsoft.com/office/drawing/2014/main" id="{E57E862F-6014-5F61-24A3-0DF553A14B45}"/>
+              </a:ext>
+            </a:extLst>
+          </p:cNvPr>
+          <p:cNvCxnSpPr>
+            <a:cxnSpLocks/>
+          </p:cNvCxnSpPr>
+          <p:nvPr/>
+        </p:nvCxnSpPr>
+        <p:spPr>
+          <a:xfrm flipH="1">
+            <a:off x="2661515" y="4170409"/>
+            <a:ext cx="2055" cy="499074"/>
+          </a:xfrm>
+          <a:prstGeom prst="line">
+            <a:avLst/>
+          </a:prstGeom>
+        </p:spPr>
+        <p:style>
+          <a:lnRef idx="2">
+            <a:schemeClr val="dk1"/>
+          </a:lnRef>
+          <a:fillRef idx="0">
+            <a:schemeClr val="dk1"/>
+          </a:fillRef>
+          <a:effectRef idx="1">
+            <a:schemeClr val="dk1"/>
+          </a:effectRef>
+          <a:fontRef idx="minor">
+            <a:schemeClr val="tx1"/>
+          </a:fontRef>
+        </p:style>
+      </p:cxnSp>
+      <p:cxnSp>
+        <p:nvCxnSpPr>
+          <p:cNvPr id="37" name="Lige forbindelse 36">
+            <a:extLst>
+              <a:ext uri="{FF2B5EF4-FFF2-40B4-BE49-F238E27FC236}">
+                <a16:creationId xmlns:a16="http://schemas.microsoft.com/office/drawing/2014/main" id="{103DD5A5-7F37-5459-A91D-2B412C847926}"/>
+              </a:ext>
+            </a:extLst>
+          </p:cNvPr>
+          <p:cNvCxnSpPr>
+            <a:cxnSpLocks/>
+          </p:cNvCxnSpPr>
+          <p:nvPr/>
+        </p:nvCxnSpPr>
+        <p:spPr>
+          <a:xfrm flipH="1">
+            <a:off x="2206376" y="4666043"/>
+            <a:ext cx="910278" cy="0"/>
+          </a:xfrm>
+          <a:prstGeom prst="line">
+            <a:avLst/>
+          </a:prstGeom>
+        </p:spPr>
+        <p:style>
+          <a:lnRef idx="2">
+            <a:schemeClr val="dk1"/>
+          </a:lnRef>
+          <a:fillRef idx="0">
+            <a:schemeClr val="dk1"/>
+          </a:fillRef>
+          <a:effectRef idx="1">
+            <a:schemeClr val="dk1"/>
+          </a:effectRef>
+          <a:fontRef idx="minor">
+            <a:schemeClr val="tx1"/>
+          </a:fontRef>
+        </p:style>
+      </p:cxnSp>
+      <p:sp>
+        <p:nvSpPr>
+          <p:cNvPr id="45" name="Tekstfelt 44">
+            <a:extLst>
+              <a:ext uri="{FF2B5EF4-FFF2-40B4-BE49-F238E27FC236}">
+                <a16:creationId xmlns:a16="http://schemas.microsoft.com/office/drawing/2014/main" id="{D6ECACF9-1706-DC92-CD29-E7064D007416}"/>
+              </a:ext>
+            </a:extLst>
+          </p:cNvPr>
+          <p:cNvSpPr txBox="1"/>
+          <p:nvPr/>
+        </p:nvSpPr>
+        <p:spPr>
+          <a:xfrm>
+            <a:off x="2579116" y="6299154"/>
+            <a:ext cx="1734065" cy="369332"/>
+          </a:xfrm>
+          <a:prstGeom prst="rect">
+            <a:avLst/>
+          </a:prstGeom>
+          <a:noFill/>
+        </p:spPr>
+        <p:txBody>
+          <a:bodyPr wrap="square" rtlCol="0">
+            <a:spAutoFit/>
+          </a:bodyPr>
+          <a:lstStyle/>
+          <a:p>
+            <a:pPr algn="ctr"/>
+            <a:r>
+              <a:rPr lang="da-DK" dirty="0" err="1"/>
+              <a:t>climate.xlsx</a:t>
+            </a:r>
+            <a:endParaRPr lang="da-DK" dirty="0"/>
+          </a:p>
+        </p:txBody>
+      </p:sp>
+      <p:cxnSp>
+        <p:nvCxnSpPr>
+          <p:cNvPr id="47" name="Lige forbindelse 46">
+            <a:extLst>
+              <a:ext uri="{FF2B5EF4-FFF2-40B4-BE49-F238E27FC236}">
+                <a16:creationId xmlns:a16="http://schemas.microsoft.com/office/drawing/2014/main" id="{95B53510-4321-B972-ABFC-74B408DAD4D2}"/>
+              </a:ext>
+            </a:extLst>
+          </p:cNvPr>
+          <p:cNvCxnSpPr>
+            <a:cxnSpLocks/>
+          </p:cNvCxnSpPr>
+          <p:nvPr/>
+        </p:nvCxnSpPr>
+        <p:spPr>
+          <a:xfrm flipH="1">
+            <a:off x="3116654" y="4656899"/>
+            <a:ext cx="2055" cy="499074"/>
+          </a:xfrm>
+          <a:prstGeom prst="line">
+            <a:avLst/>
+          </a:prstGeom>
+        </p:spPr>
+        <p:style>
+          <a:lnRef idx="2">
+            <a:schemeClr val="dk1"/>
+          </a:lnRef>
+          <a:fillRef idx="0">
+            <a:schemeClr val="dk1"/>
+          </a:fillRef>
+          <a:effectRef idx="1">
+            <a:schemeClr val="dk1"/>
+          </a:effectRef>
+          <a:fontRef idx="minor">
+            <a:schemeClr val="tx1"/>
+          </a:fontRef>
+        </p:style>
+      </p:cxnSp>
+      <p:pic>
+        <p:nvPicPr>
+          <p:cNvPr id="48" name="Grafik 47" descr="Papir kontur">
+            <a:extLst>
+              <a:ext uri="{FF2B5EF4-FFF2-40B4-BE49-F238E27FC236}">
+                <a16:creationId xmlns:a16="http://schemas.microsoft.com/office/drawing/2014/main" id="{29F4E535-4780-7EC1-3AE2-0F7770F94BCC}"/>
+              </a:ext>
+            </a:extLst>
+          </p:cNvPr>
+          <p:cNvPicPr>
+            <a:picLocks noChangeAspect="1"/>
+          </p:cNvPicPr>
+          <p:nvPr/>
+        </p:nvPicPr>
+        <p:blipFill>
+          <a:blip r:embed="rId5">
+            <a:extLst>
+              <a:ext uri="{96DAC541-7B7A-43D3-8B79-37D633B846F1}">
+                <asvg:svgBlip xmlns:asvg="http://schemas.microsoft.com/office/drawing/2016/SVG/main" r:embed="rId6"/>
+              </a:ext>
+            </a:extLst>
+          </a:blip>
+          <a:stretch>
+            <a:fillRect/>
+          </a:stretch>
+        </p:blipFill>
+        <p:spPr>
+          <a:xfrm>
+            <a:off x="1528132" y="5207673"/>
+            <a:ext cx="1133383" cy="1133383"/>
+          </a:xfrm>
+          <a:prstGeom prst="rect">
+            <a:avLst/>
+          </a:prstGeom>
+        </p:spPr>
+      </p:pic>
+      <p:cxnSp>
+        <p:nvCxnSpPr>
+          <p:cNvPr id="50" name="Lige forbindelse 49">
+            <a:extLst>
+              <a:ext uri="{FF2B5EF4-FFF2-40B4-BE49-F238E27FC236}">
+                <a16:creationId xmlns:a16="http://schemas.microsoft.com/office/drawing/2014/main" id="{C9305B14-892B-962E-4037-966FC28E821D}"/>
+              </a:ext>
+            </a:extLst>
+          </p:cNvPr>
+          <p:cNvCxnSpPr>
+            <a:cxnSpLocks/>
+          </p:cNvCxnSpPr>
+          <p:nvPr/>
+        </p:nvCxnSpPr>
+        <p:spPr>
+          <a:xfrm flipH="1">
+            <a:off x="2206376" y="4656899"/>
+            <a:ext cx="2055" cy="499074"/>
+          </a:xfrm>
+          <a:prstGeom prst="line">
+            <a:avLst/>
+          </a:prstGeom>
+        </p:spPr>
+        <p:style>
+          <a:lnRef idx="2">
+            <a:schemeClr val="dk1"/>
+          </a:lnRef>
+          <a:fillRef idx="0">
+            <a:schemeClr val="dk1"/>
+          </a:fillRef>
+          <a:effectRef idx="1">
+            <a:schemeClr val="dk1"/>
+          </a:effectRef>
+          <a:fontRef idx="minor">
+            <a:schemeClr val="tx1"/>
+          </a:fontRef>
+        </p:style>
+      </p:cxnSp>
+      <p:pic>
+        <p:nvPicPr>
+          <p:cNvPr id="52" name="Grafik 51" descr="Papir kontur">
+            <a:extLst>
+              <a:ext uri="{FF2B5EF4-FFF2-40B4-BE49-F238E27FC236}">
+                <a16:creationId xmlns:a16="http://schemas.microsoft.com/office/drawing/2014/main" id="{3DE79009-E225-374F-4B31-B97C687D989F}"/>
+              </a:ext>
+            </a:extLst>
+          </p:cNvPr>
+          <p:cNvPicPr>
+            <a:picLocks noChangeAspect="1"/>
+          </p:cNvPicPr>
+          <p:nvPr/>
+        </p:nvPicPr>
+        <p:blipFill>
+          <a:blip r:embed="rId5">
+            <a:extLst>
+              <a:ext uri="{96DAC541-7B7A-43D3-8B79-37D633B846F1}">
+                <asvg:svgBlip xmlns:asvg="http://schemas.microsoft.com/office/drawing/2016/SVG/main" r:embed="rId6"/>
+              </a:ext>
+            </a:extLst>
+          </a:blip>
+          <a:stretch>
+            <a:fillRect/>
+          </a:stretch>
+        </p:blipFill>
+        <p:spPr>
+          <a:xfrm>
+            <a:off x="2828002" y="5207673"/>
+            <a:ext cx="1133383" cy="1133383"/>
+          </a:xfrm>
+          <a:prstGeom prst="rect">
+            <a:avLst/>
+          </a:prstGeom>
+        </p:spPr>
+      </p:pic>
+      <p:sp>
+        <p:nvSpPr>
+          <p:cNvPr id="80" name="Tekstfelt 79">
+            <a:extLst>
+              <a:ext uri="{FF2B5EF4-FFF2-40B4-BE49-F238E27FC236}">
+                <a16:creationId xmlns:a16="http://schemas.microsoft.com/office/drawing/2014/main" id="{5A8D4FDB-CE2A-5582-2020-9544233E643F}"/>
+              </a:ext>
+            </a:extLst>
+          </p:cNvPr>
+          <p:cNvSpPr txBox="1"/>
+          <p:nvPr/>
+        </p:nvSpPr>
+        <p:spPr>
+          <a:xfrm>
+            <a:off x="9617343" y="6338473"/>
+            <a:ext cx="2275687" cy="369332"/>
+          </a:xfrm>
+          <a:prstGeom prst="rect">
+            <a:avLst/>
+          </a:prstGeom>
+          <a:noFill/>
+        </p:spPr>
+        <p:txBody>
+          <a:bodyPr wrap="square" rtlCol="0">
+            <a:spAutoFit/>
+          </a:bodyPr>
+          <a:lstStyle/>
+          <a:p>
+            <a:pPr algn="ctr"/>
+            <a:r>
+              <a:rPr lang="da-DK" dirty="0"/>
+              <a:t>presentation1A.qmd</a:t>
+            </a:r>
+          </a:p>
+        </p:txBody>
+      </p:sp>
+      <p:pic>
+        <p:nvPicPr>
+          <p:cNvPr id="84" name="Grafik 83" descr="Papir kontur">
+            <a:extLst>
+              <a:ext uri="{FF2B5EF4-FFF2-40B4-BE49-F238E27FC236}">
+                <a16:creationId xmlns:a16="http://schemas.microsoft.com/office/drawing/2014/main" id="{2CD4961C-BD7A-066D-19D7-6B6B4E927754}"/>
+              </a:ext>
+            </a:extLst>
+          </p:cNvPr>
+          <p:cNvPicPr>
+            <a:picLocks noChangeAspect="1"/>
+          </p:cNvPicPr>
+          <p:nvPr/>
+        </p:nvPicPr>
+        <p:blipFill>
+          <a:blip r:embed="rId5">
+            <a:extLst>
+              <a:ext uri="{96DAC541-7B7A-43D3-8B79-37D633B846F1}">
+                <asvg:svgBlip xmlns:asvg="http://schemas.microsoft.com/office/drawing/2016/SVG/main" r:embed="rId6"/>
+              </a:ext>
+            </a:extLst>
+          </a:blip>
+          <a:stretch>
+            <a:fillRect/>
+          </a:stretch>
+        </p:blipFill>
+        <p:spPr>
+          <a:xfrm>
+            <a:off x="10188496" y="5237061"/>
+            <a:ext cx="1133383" cy="1133383"/>
+          </a:xfrm>
+          <a:prstGeom prst="rect">
+            <a:avLst/>
+          </a:prstGeom>
+        </p:spPr>
+      </p:pic>
+      <p:sp>
+        <p:nvSpPr>
+          <p:cNvPr id="85" name="Tekstfelt 84">
+            <a:extLst>
+              <a:ext uri="{FF2B5EF4-FFF2-40B4-BE49-F238E27FC236}">
+                <a16:creationId xmlns:a16="http://schemas.microsoft.com/office/drawing/2014/main" id="{B4ECC655-4E1E-9027-B631-B9B8D0E2BA5F}"/>
+              </a:ext>
+            </a:extLst>
+          </p:cNvPr>
+          <p:cNvSpPr txBox="1"/>
+          <p:nvPr/>
+        </p:nvSpPr>
+        <p:spPr>
+          <a:xfrm>
+            <a:off x="1227790" y="6295715"/>
+            <a:ext cx="1734065" cy="369332"/>
+          </a:xfrm>
+          <a:prstGeom prst="rect">
+            <a:avLst/>
+          </a:prstGeom>
+          <a:noFill/>
+        </p:spPr>
+        <p:txBody>
+          <a:bodyPr wrap="square" rtlCol="0">
+            <a:spAutoFit/>
+          </a:bodyPr>
+          <a:lstStyle/>
+          <a:p>
+            <a:pPr algn="ctr"/>
+            <a:r>
+              <a:rPr lang="da-DK" dirty="0"/>
+              <a:t>[…].</a:t>
+            </a:r>
+            <a:r>
+              <a:rPr lang="da-DK" dirty="0" err="1"/>
+              <a:t>xlsx</a:t>
+            </a:r>
+            <a:endParaRPr lang="da-DK" dirty="0"/>
+          </a:p>
+        </p:txBody>
+      </p:sp>
+      <p:cxnSp>
+        <p:nvCxnSpPr>
+          <p:cNvPr id="2" name="Lige forbindelse 1">
+            <a:extLst>
+              <a:ext uri="{FF2B5EF4-FFF2-40B4-BE49-F238E27FC236}">
+                <a16:creationId xmlns:a16="http://schemas.microsoft.com/office/drawing/2014/main" id="{C04A3209-8D9F-E8F4-8BAD-D395CA1E3020}"/>
+              </a:ext>
+            </a:extLst>
+          </p:cNvPr>
+          <p:cNvCxnSpPr>
+            <a:cxnSpLocks/>
+          </p:cNvCxnSpPr>
+          <p:nvPr/>
+        </p:nvCxnSpPr>
+        <p:spPr>
+          <a:xfrm flipH="1">
+            <a:off x="9854453" y="4170409"/>
+            <a:ext cx="2055" cy="499074"/>
+          </a:xfrm>
+          <a:prstGeom prst="line">
+            <a:avLst/>
+          </a:prstGeom>
+        </p:spPr>
+        <p:style>
+          <a:lnRef idx="2">
+            <a:schemeClr val="dk1"/>
+          </a:lnRef>
+          <a:fillRef idx="0">
+            <a:schemeClr val="dk1"/>
+          </a:fillRef>
+          <a:effectRef idx="1">
+            <a:schemeClr val="dk1"/>
+          </a:effectRef>
+          <a:fontRef idx="minor">
+            <a:schemeClr val="tx1"/>
+          </a:fontRef>
+        </p:style>
+      </p:cxnSp>
+      <p:cxnSp>
+        <p:nvCxnSpPr>
+          <p:cNvPr id="3" name="Lige forbindelse 2">
+            <a:extLst>
+              <a:ext uri="{FF2B5EF4-FFF2-40B4-BE49-F238E27FC236}">
+                <a16:creationId xmlns:a16="http://schemas.microsoft.com/office/drawing/2014/main" id="{C0FCEB3A-0C9D-8516-1DF5-E5419E579DFC}"/>
+              </a:ext>
+            </a:extLst>
+          </p:cNvPr>
+          <p:cNvCxnSpPr>
+            <a:cxnSpLocks/>
+          </p:cNvCxnSpPr>
+          <p:nvPr/>
+        </p:nvCxnSpPr>
+        <p:spPr>
+          <a:xfrm flipH="1">
+            <a:off x="9008979" y="4656899"/>
+            <a:ext cx="1588522" cy="0"/>
+          </a:xfrm>
+          <a:prstGeom prst="line">
+            <a:avLst/>
+          </a:prstGeom>
+        </p:spPr>
+        <p:style>
+          <a:lnRef idx="2">
+            <a:schemeClr val="dk1"/>
+          </a:lnRef>
+          <a:fillRef idx="0">
+            <a:schemeClr val="dk1"/>
+          </a:fillRef>
+          <a:effectRef idx="1">
+            <a:schemeClr val="dk1"/>
+          </a:effectRef>
+          <a:fontRef idx="minor">
+            <a:schemeClr val="tx1"/>
+          </a:fontRef>
+        </p:style>
+      </p:cxnSp>
+      <p:cxnSp>
+        <p:nvCxnSpPr>
+          <p:cNvPr id="4" name="Lige forbindelse 3">
+            <a:extLst>
+              <a:ext uri="{FF2B5EF4-FFF2-40B4-BE49-F238E27FC236}">
+                <a16:creationId xmlns:a16="http://schemas.microsoft.com/office/drawing/2014/main" id="{D156F6ED-9241-7475-7F80-8C97FA0B0CA9}"/>
+              </a:ext>
+            </a:extLst>
+          </p:cNvPr>
+          <p:cNvCxnSpPr>
+            <a:cxnSpLocks/>
+          </p:cNvCxnSpPr>
+          <p:nvPr/>
+        </p:nvCxnSpPr>
+        <p:spPr>
+          <a:xfrm flipH="1">
+            <a:off x="10584245" y="4656899"/>
+            <a:ext cx="2055" cy="499074"/>
+          </a:xfrm>
+          <a:prstGeom prst="line">
+            <a:avLst/>
+          </a:prstGeom>
+        </p:spPr>
+        <p:style>
+          <a:lnRef idx="2">
+            <a:schemeClr val="dk1"/>
+          </a:lnRef>
+          <a:fillRef idx="0">
+            <a:schemeClr val="dk1"/>
+          </a:fillRef>
+          <a:effectRef idx="1">
+            <a:schemeClr val="dk1"/>
+          </a:effectRef>
+          <a:fontRef idx="minor">
+            <a:schemeClr val="tx1"/>
+          </a:fontRef>
+        </p:style>
+      </p:cxnSp>
+      <p:cxnSp>
+        <p:nvCxnSpPr>
+          <p:cNvPr id="5" name="Lige forbindelse 4">
+            <a:extLst>
+              <a:ext uri="{FF2B5EF4-FFF2-40B4-BE49-F238E27FC236}">
+                <a16:creationId xmlns:a16="http://schemas.microsoft.com/office/drawing/2014/main" id="{F1624DCD-F827-EFF6-38B8-8732611DED3F}"/>
+              </a:ext>
+            </a:extLst>
+          </p:cNvPr>
+          <p:cNvCxnSpPr>
+            <a:cxnSpLocks/>
+          </p:cNvCxnSpPr>
+          <p:nvPr/>
+        </p:nvCxnSpPr>
+        <p:spPr>
+          <a:xfrm flipH="1">
+            <a:off x="9023430" y="4656899"/>
+            <a:ext cx="2055" cy="499074"/>
+          </a:xfrm>
+          <a:prstGeom prst="line">
+            <a:avLst/>
+          </a:prstGeom>
+        </p:spPr>
+        <p:style>
+          <a:lnRef idx="2">
+            <a:schemeClr val="dk1"/>
+          </a:lnRef>
+          <a:fillRef idx="0">
+            <a:schemeClr val="dk1"/>
+          </a:fillRef>
+          <a:effectRef idx="1">
+            <a:schemeClr val="dk1"/>
+          </a:effectRef>
+          <a:fontRef idx="minor">
+            <a:schemeClr val="tx1"/>
+          </a:fontRef>
+        </p:style>
+      </p:cxnSp>
+      <p:sp>
+        <p:nvSpPr>
+          <p:cNvPr id="6" name="Tekstfelt 5">
+            <a:extLst>
+              <a:ext uri="{FF2B5EF4-FFF2-40B4-BE49-F238E27FC236}">
+                <a16:creationId xmlns:a16="http://schemas.microsoft.com/office/drawing/2014/main" id="{63EB5487-E644-1400-98C4-7C22433A8EA0}"/>
+              </a:ext>
+            </a:extLst>
+          </p:cNvPr>
+          <p:cNvSpPr txBox="1"/>
+          <p:nvPr/>
+        </p:nvSpPr>
+        <p:spPr>
+          <a:xfrm>
+            <a:off x="7908348" y="6338473"/>
+            <a:ext cx="2275687" cy="369332"/>
+          </a:xfrm>
+          <a:prstGeom prst="rect">
+            <a:avLst/>
+          </a:prstGeom>
+          <a:noFill/>
+        </p:spPr>
+        <p:txBody>
+          <a:bodyPr wrap="square" rtlCol="0">
+            <a:spAutoFit/>
+          </a:bodyPr>
+          <a:lstStyle/>
+          <a:p>
+            <a:pPr algn="ctr"/>
+            <a:r>
+              <a:rPr lang="da-DK" dirty="0"/>
+              <a:t>…</a:t>
+            </a:r>
+          </a:p>
+        </p:txBody>
+      </p:sp>
+      <p:pic>
+        <p:nvPicPr>
+          <p:cNvPr id="7" name="Grafik 6" descr="Papir kontur">
+            <a:extLst>
+              <a:ext uri="{FF2B5EF4-FFF2-40B4-BE49-F238E27FC236}">
+                <a16:creationId xmlns:a16="http://schemas.microsoft.com/office/drawing/2014/main" id="{3FA46177-4497-BDF3-1BDD-B1F8FB896140}"/>
+              </a:ext>
+            </a:extLst>
+          </p:cNvPr>
+          <p:cNvPicPr>
+            <a:picLocks noChangeAspect="1"/>
+          </p:cNvPicPr>
+          <p:nvPr/>
+        </p:nvPicPr>
+        <p:blipFill>
+          <a:blip r:embed="rId5">
+            <a:extLst>
+              <a:ext uri="{96DAC541-7B7A-43D3-8B79-37D633B846F1}">
+                <asvg:svgBlip xmlns:asvg="http://schemas.microsoft.com/office/drawing/2016/SVG/main" r:embed="rId6"/>
+              </a:ext>
+            </a:extLst>
+          </a:blip>
+          <a:stretch>
+            <a:fillRect/>
+          </a:stretch>
+        </p:blipFill>
+        <p:spPr>
+          <a:xfrm>
+            <a:off x="8479501" y="5237061"/>
+            <a:ext cx="1133383" cy="1133383"/>
+          </a:xfrm>
+          <a:prstGeom prst="rect">
+            <a:avLst/>
+          </a:prstGeom>
+        </p:spPr>
+      </p:pic>
+      <p:sp>
+        <p:nvSpPr>
+          <p:cNvPr id="8" name="Tekstfelt 7">
+            <a:extLst>
+              <a:ext uri="{FF2B5EF4-FFF2-40B4-BE49-F238E27FC236}">
+                <a16:creationId xmlns:a16="http://schemas.microsoft.com/office/drawing/2014/main" id="{9CD4778D-AA53-18FC-F92E-B552FDF8FAFD}"/>
+              </a:ext>
+            </a:extLst>
+          </p:cNvPr>
+          <p:cNvSpPr txBox="1"/>
+          <p:nvPr/>
+        </p:nvSpPr>
+        <p:spPr>
+          <a:xfrm>
+            <a:off x="5132452" y="4170408"/>
+            <a:ext cx="1885830" cy="369332"/>
+          </a:xfrm>
+          <a:prstGeom prst="rect">
+            <a:avLst/>
+          </a:prstGeom>
+          <a:solidFill>
+            <a:schemeClr val="accent1">
+              <a:alpha val="50000"/>
+            </a:schemeClr>
+          </a:solidFill>
+          <a:ln w="12700">
+            <a:solidFill>
+              <a:srgbClr val="002060"/>
+            </a:solidFill>
+          </a:ln>
+        </p:spPr>
+        <p:style>
+          <a:lnRef idx="0">
+            <a:scrgbClr r="0" g="0" b="0"/>
+          </a:lnRef>
+          <a:fillRef idx="0">
+            <a:scrgbClr r="0" g="0" b="0"/>
+          </a:fillRef>
+          <a:effectRef idx="0">
+            <a:scrgbClr r="0" g="0" b="0"/>
+          </a:effectRef>
+          <a:fontRef idx="minor">
+            <a:schemeClr val="lt1"/>
+          </a:fontRef>
+        </p:style>
+        <p:txBody>
+          <a:bodyPr wrap="square" rtlCol="0">
+            <a:spAutoFit/>
+          </a:bodyPr>
+          <a:lstStyle/>
+          <a:p>
+            <a:pPr algn="ctr"/>
+            <a:r>
+              <a:rPr lang="da-DK" dirty="0"/>
+              <a:t>Current location</a:t>
+            </a:r>
+          </a:p>
+        </p:txBody>
+      </p:sp>
+      <p:sp>
+        <p:nvSpPr>
+          <p:cNvPr id="9" name="Tekstfelt 8">
+            <a:extLst>
+              <a:ext uri="{FF2B5EF4-FFF2-40B4-BE49-F238E27FC236}">
+                <a16:creationId xmlns:a16="http://schemas.microsoft.com/office/drawing/2014/main" id="{A93DC5BB-E158-4C19-4951-7A9837CF5F85}"/>
+              </a:ext>
+            </a:extLst>
+          </p:cNvPr>
+          <p:cNvSpPr txBox="1"/>
+          <p:nvPr/>
+        </p:nvSpPr>
+        <p:spPr>
+          <a:xfrm>
+            <a:off x="6110466" y="2255548"/>
+            <a:ext cx="1734065" cy="369332"/>
+          </a:xfrm>
+          <a:prstGeom prst="rect">
+            <a:avLst/>
+          </a:prstGeom>
+          <a:noFill/>
+        </p:spPr>
+        <p:txBody>
+          <a:bodyPr wrap="square" rtlCol="0">
+            <a:spAutoFit/>
+          </a:bodyPr>
+          <a:lstStyle/>
+          <a:p>
+            <a:pPr algn="ctr"/>
+            <a:r>
+              <a:rPr lang="da-DK" dirty="0">
+                <a:solidFill>
+                  <a:srgbClr val="FF0000"/>
+                </a:solidFill>
+              </a:rPr>
+              <a:t>..</a:t>
+            </a:r>
+          </a:p>
+        </p:txBody>
+      </p:sp>
+      <p:cxnSp>
+        <p:nvCxnSpPr>
+          <p:cNvPr id="15" name="Lige pilforbindelse 14">
+            <a:extLst>
+              <a:ext uri="{FF2B5EF4-FFF2-40B4-BE49-F238E27FC236}">
+                <a16:creationId xmlns:a16="http://schemas.microsoft.com/office/drawing/2014/main" id="{59F3DAD7-59A6-0417-0422-12045319CAE0}"/>
+              </a:ext>
+            </a:extLst>
+          </p:cNvPr>
+          <p:cNvCxnSpPr>
+            <a:cxnSpLocks/>
+          </p:cNvCxnSpPr>
+          <p:nvPr/>
+        </p:nvCxnSpPr>
+        <p:spPr>
+          <a:xfrm flipV="1">
+            <a:off x="6965084" y="1140523"/>
+            <a:ext cx="0" cy="1215585"/>
+          </a:xfrm>
+          <a:prstGeom prst="straightConnector1">
+            <a:avLst/>
+          </a:prstGeom>
+          <a:ln>
+            <a:solidFill>
+              <a:srgbClr val="FF0000"/>
+            </a:solidFill>
+            <a:tailEnd type="triangle"/>
+          </a:ln>
+        </p:spPr>
+        <p:style>
+          <a:lnRef idx="2">
+            <a:schemeClr val="accent1"/>
+          </a:lnRef>
+          <a:fillRef idx="0">
+            <a:schemeClr val="accent1"/>
+          </a:fillRef>
+          <a:effectRef idx="1">
+            <a:schemeClr val="accent1"/>
+          </a:effectRef>
+          <a:fontRef idx="minor">
+            <a:schemeClr val="tx1"/>
+          </a:fontRef>
+        </p:style>
+      </p:cxnSp>
+      <p:cxnSp>
+        <p:nvCxnSpPr>
+          <p:cNvPr id="21" name="Lige forbindelse 20">
+            <a:extLst>
+              <a:ext uri="{FF2B5EF4-FFF2-40B4-BE49-F238E27FC236}">
+                <a16:creationId xmlns:a16="http://schemas.microsoft.com/office/drawing/2014/main" id="{E261A8C7-93AE-4424-494C-9BED3A772548}"/>
+              </a:ext>
+            </a:extLst>
+          </p:cNvPr>
+          <p:cNvCxnSpPr>
+            <a:cxnSpLocks/>
+          </p:cNvCxnSpPr>
+          <p:nvPr/>
+        </p:nvCxnSpPr>
+        <p:spPr>
+          <a:xfrm>
+            <a:off x="6965084" y="2655466"/>
+            <a:ext cx="0" cy="614390"/>
+          </a:xfrm>
+          <a:prstGeom prst="line">
+            <a:avLst/>
+          </a:prstGeom>
+          <a:ln>
+            <a:solidFill>
+              <a:srgbClr val="FF0000"/>
+            </a:solidFill>
+          </a:ln>
+        </p:spPr>
+        <p:style>
+          <a:lnRef idx="2">
+            <a:schemeClr val="accent1"/>
+          </a:lnRef>
+          <a:fillRef idx="0">
+            <a:schemeClr val="accent1"/>
+          </a:fillRef>
+          <a:effectRef idx="1">
+            <a:schemeClr val="accent1"/>
+          </a:effectRef>
+          <a:fontRef idx="minor">
+            <a:schemeClr val="tx1"/>
+          </a:fontRef>
+        </p:style>
+      </p:cxnSp>
+      <p:cxnSp>
+        <p:nvCxnSpPr>
+          <p:cNvPr id="24" name="Lige forbindelse 23">
+            <a:extLst>
+              <a:ext uri="{FF2B5EF4-FFF2-40B4-BE49-F238E27FC236}">
+                <a16:creationId xmlns:a16="http://schemas.microsoft.com/office/drawing/2014/main" id="{FB2CDE43-D9B9-2B5A-BA72-61EF76E91103}"/>
+              </a:ext>
+            </a:extLst>
+          </p:cNvPr>
+          <p:cNvCxnSpPr>
+            <a:cxnSpLocks/>
+          </p:cNvCxnSpPr>
+          <p:nvPr/>
+        </p:nvCxnSpPr>
+        <p:spPr>
+          <a:xfrm>
+            <a:off x="3753016" y="1254874"/>
+            <a:ext cx="1478003" cy="0"/>
+          </a:xfrm>
+          <a:prstGeom prst="line">
+            <a:avLst/>
+          </a:prstGeom>
+          <a:ln/>
+        </p:spPr>
+        <p:style>
+          <a:lnRef idx="1">
+            <a:schemeClr val="accent4"/>
+          </a:lnRef>
+          <a:fillRef idx="0">
+            <a:schemeClr val="accent4"/>
+          </a:fillRef>
+          <a:effectRef idx="0">
+            <a:schemeClr val="accent4"/>
+          </a:effectRef>
+          <a:fontRef idx="minor">
+            <a:schemeClr val="tx1"/>
+          </a:fontRef>
+        </p:style>
+      </p:cxnSp>
+      <p:cxnSp>
+        <p:nvCxnSpPr>
+          <p:cNvPr id="27" name="Lige pilforbindelse 26">
+            <a:extLst>
+              <a:ext uri="{FF2B5EF4-FFF2-40B4-BE49-F238E27FC236}">
+                <a16:creationId xmlns:a16="http://schemas.microsoft.com/office/drawing/2014/main" id="{00B0CF9C-5508-C3CD-D7F7-5D3EF638D561}"/>
+              </a:ext>
+            </a:extLst>
+          </p:cNvPr>
+          <p:cNvCxnSpPr>
+            <a:cxnSpLocks/>
+          </p:cNvCxnSpPr>
+          <p:nvPr/>
+        </p:nvCxnSpPr>
+        <p:spPr>
+          <a:xfrm>
+            <a:off x="3397576" y="1499330"/>
+            <a:ext cx="811" cy="1617581"/>
+          </a:xfrm>
+          <a:prstGeom prst="straightConnector1">
+            <a:avLst/>
+          </a:prstGeom>
+          <a:ln>
+            <a:tailEnd type="triangle"/>
+          </a:ln>
+        </p:spPr>
+        <p:style>
+          <a:lnRef idx="1">
+            <a:schemeClr val="accent4"/>
+          </a:lnRef>
+          <a:fillRef idx="0">
+            <a:schemeClr val="accent4"/>
+          </a:fillRef>
+          <a:effectRef idx="0">
+            <a:schemeClr val="accent4"/>
+          </a:effectRef>
+          <a:fontRef idx="minor">
+            <a:schemeClr val="tx1"/>
+          </a:fontRef>
+        </p:style>
+      </p:cxnSp>
+      <p:sp>
+        <p:nvSpPr>
+          <p:cNvPr id="38" name="Tekstfelt 37">
+            <a:extLst>
+              <a:ext uri="{FF2B5EF4-FFF2-40B4-BE49-F238E27FC236}">
+                <a16:creationId xmlns:a16="http://schemas.microsoft.com/office/drawing/2014/main" id="{8FCE1735-8513-B110-086E-5622EC1ADE0B}"/>
+              </a:ext>
+            </a:extLst>
+          </p:cNvPr>
+          <p:cNvSpPr txBox="1"/>
+          <p:nvPr/>
+        </p:nvSpPr>
+        <p:spPr>
+          <a:xfrm>
+            <a:off x="2445252" y="1091464"/>
+            <a:ext cx="1734065" cy="369332"/>
+          </a:xfrm>
+          <a:prstGeom prst="rect">
+            <a:avLst/>
+          </a:prstGeom>
+          <a:noFill/>
+        </p:spPr>
+        <p:txBody>
+          <a:bodyPr wrap="square" rtlCol="0">
+            <a:spAutoFit/>
+          </a:bodyPr>
+          <a:lstStyle/>
+          <a:p>
+            <a:pPr algn="ctr"/>
+            <a:r>
+              <a:rPr lang="da-DK" dirty="0">
+                <a:solidFill>
+                  <a:srgbClr val="00B0F0"/>
+                </a:solidFill>
+              </a:rPr>
+              <a:t>/Data</a:t>
+            </a:r>
+          </a:p>
+        </p:txBody>
+      </p:sp>
+      <p:sp>
+        <p:nvSpPr>
+          <p:cNvPr id="41" name="Tekstfelt 40">
+            <a:extLst>
+              <a:ext uri="{FF2B5EF4-FFF2-40B4-BE49-F238E27FC236}">
+                <a16:creationId xmlns:a16="http://schemas.microsoft.com/office/drawing/2014/main" id="{04083333-550A-7653-914B-881F6913F069}"/>
+              </a:ext>
+            </a:extLst>
+          </p:cNvPr>
+          <p:cNvSpPr txBox="1"/>
+          <p:nvPr/>
+        </p:nvSpPr>
+        <p:spPr>
+          <a:xfrm>
+            <a:off x="3080974" y="4874009"/>
+            <a:ext cx="1734065" cy="369332"/>
+          </a:xfrm>
+          <a:prstGeom prst="rect">
+            <a:avLst/>
+          </a:prstGeom>
+          <a:noFill/>
+        </p:spPr>
+        <p:txBody>
+          <a:bodyPr wrap="square" rtlCol="0">
+            <a:spAutoFit/>
+          </a:bodyPr>
+          <a:lstStyle/>
+          <a:p>
+            <a:pPr algn="ctr"/>
+            <a:r>
+              <a:rPr lang="da-DK" dirty="0">
+                <a:solidFill>
+                  <a:srgbClr val="00B050"/>
+                </a:solidFill>
+              </a:rPr>
+              <a:t>/</a:t>
+            </a:r>
+            <a:r>
+              <a:rPr lang="da-DK" dirty="0" err="1">
+                <a:solidFill>
+                  <a:srgbClr val="00B050"/>
+                </a:solidFill>
+              </a:rPr>
+              <a:t>climate.xlsx</a:t>
+            </a:r>
+            <a:endParaRPr lang="da-DK" dirty="0">
+              <a:solidFill>
+                <a:srgbClr val="00B050"/>
+              </a:solidFill>
+            </a:endParaRPr>
+          </a:p>
+        </p:txBody>
+      </p:sp>
+      <p:cxnSp>
+        <p:nvCxnSpPr>
+          <p:cNvPr id="49" name="Lige pilforbindelse 48">
+            <a:extLst>
+              <a:ext uri="{FF2B5EF4-FFF2-40B4-BE49-F238E27FC236}">
+                <a16:creationId xmlns:a16="http://schemas.microsoft.com/office/drawing/2014/main" id="{B2AE21B0-3039-439F-C30A-92B9680E0ECA}"/>
+              </a:ext>
+            </a:extLst>
+          </p:cNvPr>
+          <p:cNvCxnSpPr>
+            <a:cxnSpLocks/>
+          </p:cNvCxnSpPr>
+          <p:nvPr/>
+        </p:nvCxnSpPr>
+        <p:spPr>
+          <a:xfrm>
+            <a:off x="3398387" y="3524882"/>
+            <a:ext cx="0" cy="1291053"/>
+          </a:xfrm>
+          <a:prstGeom prst="straightConnector1">
+            <a:avLst/>
+          </a:prstGeom>
+          <a:ln>
+            <a:tailEnd type="triangle"/>
+          </a:ln>
+        </p:spPr>
+        <p:style>
+          <a:lnRef idx="1">
+            <a:schemeClr val="accent6"/>
+          </a:lnRef>
+          <a:fillRef idx="0">
+            <a:schemeClr val="accent6"/>
+          </a:fillRef>
+          <a:effectRef idx="0">
+            <a:schemeClr val="accent6"/>
+          </a:effectRef>
+          <a:fontRef idx="minor">
+            <a:schemeClr val="tx1"/>
+          </a:fontRef>
+        </p:style>
+      </p:cxnSp>
+      <p:sp>
+        <p:nvSpPr>
+          <p:cNvPr id="51" name="Tekstfelt 50">
+            <a:extLst>
+              <a:ext uri="{FF2B5EF4-FFF2-40B4-BE49-F238E27FC236}">
+                <a16:creationId xmlns:a16="http://schemas.microsoft.com/office/drawing/2014/main" id="{23C8CA99-BD8B-AFAC-421C-8D6E8B8D82E5}"/>
+              </a:ext>
+            </a:extLst>
+          </p:cNvPr>
+          <p:cNvSpPr txBox="1"/>
+          <p:nvPr/>
+        </p:nvSpPr>
+        <p:spPr>
+          <a:xfrm>
+            <a:off x="7317336" y="2378062"/>
+            <a:ext cx="2191947" cy="276999"/>
+          </a:xfrm>
+          <a:prstGeom prst="rect">
+            <a:avLst/>
+          </a:prstGeom>
+          <a:solidFill>
+            <a:schemeClr val="accent1">
+              <a:alpha val="50000"/>
+            </a:schemeClr>
+          </a:solidFill>
+          <a:ln w="12700">
+            <a:solidFill>
+              <a:srgbClr val="002060"/>
+            </a:solidFill>
+          </a:ln>
+        </p:spPr>
+        <p:style>
+          <a:lnRef idx="0">
+            <a:scrgbClr r="0" g="0" b="0"/>
+          </a:lnRef>
+          <a:fillRef idx="0">
+            <a:scrgbClr r="0" g="0" b="0"/>
+          </a:fillRef>
+          <a:effectRef idx="0">
+            <a:scrgbClr r="0" g="0" b="0"/>
+          </a:effectRef>
+          <a:fontRef idx="minor">
+            <a:schemeClr val="lt1"/>
+          </a:fontRef>
+        </p:style>
+        <p:txBody>
+          <a:bodyPr wrap="none" rtlCol="0">
+            <a:spAutoFit/>
+          </a:bodyPr>
+          <a:lstStyle/>
+          <a:p>
+            <a:pPr algn="ctr"/>
+            <a:r>
+              <a:rPr lang="da-DK" sz="1200" dirty="0"/>
+              <a:t>Go </a:t>
+            </a:r>
+            <a:r>
+              <a:rPr lang="da-DK" sz="1200" dirty="0" err="1"/>
+              <a:t>one</a:t>
+            </a:r>
+            <a:r>
+              <a:rPr lang="da-DK" sz="1200" dirty="0"/>
+              <a:t> folder back/up with ”..”</a:t>
+            </a:r>
+          </a:p>
+        </p:txBody>
+      </p:sp>
+      <p:sp>
+        <p:nvSpPr>
+          <p:cNvPr id="54" name="Tekstfelt 53">
+            <a:extLst>
+              <a:ext uri="{FF2B5EF4-FFF2-40B4-BE49-F238E27FC236}">
+                <a16:creationId xmlns:a16="http://schemas.microsoft.com/office/drawing/2014/main" id="{DD90E60C-B088-BA13-4002-4026CA38649C}"/>
+              </a:ext>
+            </a:extLst>
+          </p:cNvPr>
+          <p:cNvSpPr txBox="1"/>
+          <p:nvPr/>
+        </p:nvSpPr>
+        <p:spPr>
+          <a:xfrm>
+            <a:off x="7149709" y="81079"/>
+            <a:ext cx="4926350" cy="369332"/>
+          </a:xfrm>
+          <a:prstGeom prst="rect">
+            <a:avLst/>
+          </a:prstGeom>
+          <a:noFill/>
+          <a:ln w="28575">
+            <a:solidFill>
+              <a:schemeClr val="accent1"/>
+            </a:solidFill>
+          </a:ln>
+        </p:spPr>
+        <p:txBody>
+          <a:bodyPr wrap="none" rtlCol="0">
+            <a:spAutoFit/>
+          </a:bodyPr>
+          <a:lstStyle/>
+          <a:p>
+            <a:pPr algn="ctr"/>
+            <a:r>
+              <a:rPr lang="da-DK" dirty="0" err="1">
+                <a:latin typeface="Menlo" panose="020B0609030804020204" pitchFamily="49" charset="0"/>
+                <a:ea typeface="Menlo" panose="020B0609030804020204" pitchFamily="49" charset="0"/>
+                <a:cs typeface="Menlo" panose="020B0609030804020204" pitchFamily="49" charset="0"/>
+              </a:rPr>
+              <a:t>read_excel</a:t>
+            </a:r>
+            <a:r>
+              <a:rPr lang="da-DK" dirty="0">
+                <a:latin typeface="Menlo" panose="020B0609030804020204" pitchFamily="49" charset="0"/>
+                <a:ea typeface="Menlo" panose="020B0609030804020204" pitchFamily="49" charset="0"/>
+                <a:cs typeface="Menlo" panose="020B0609030804020204" pitchFamily="49" charset="0"/>
+              </a:rPr>
+              <a:t>("</a:t>
+            </a:r>
+            <a:r>
+              <a:rPr lang="da-DK" dirty="0">
+                <a:solidFill>
+                  <a:srgbClr val="FF0000"/>
+                </a:solidFill>
+                <a:latin typeface="Menlo" panose="020B0609030804020204" pitchFamily="49" charset="0"/>
+                <a:ea typeface="Menlo" panose="020B0609030804020204" pitchFamily="49" charset="0"/>
+                <a:cs typeface="Menlo" panose="020B0609030804020204" pitchFamily="49" charset="0"/>
+              </a:rPr>
+              <a:t>..</a:t>
+            </a:r>
+            <a:r>
+              <a:rPr lang="da-DK" dirty="0">
+                <a:solidFill>
+                  <a:srgbClr val="00B0F0"/>
+                </a:solidFill>
+                <a:latin typeface="Menlo" panose="020B0609030804020204" pitchFamily="49" charset="0"/>
+                <a:ea typeface="Menlo" panose="020B0609030804020204" pitchFamily="49" charset="0"/>
+                <a:cs typeface="Menlo" panose="020B0609030804020204" pitchFamily="49" charset="0"/>
+              </a:rPr>
+              <a:t>/Data</a:t>
+            </a:r>
+            <a:r>
+              <a:rPr lang="da-DK" dirty="0">
+                <a:solidFill>
+                  <a:srgbClr val="00B050"/>
+                </a:solidFill>
+                <a:latin typeface="Menlo" panose="020B0609030804020204" pitchFamily="49" charset="0"/>
+                <a:ea typeface="Menlo" panose="020B0609030804020204" pitchFamily="49" charset="0"/>
+                <a:cs typeface="Menlo" panose="020B0609030804020204" pitchFamily="49" charset="0"/>
+              </a:rPr>
+              <a:t>/</a:t>
+            </a:r>
+            <a:r>
+              <a:rPr lang="da-DK" dirty="0" err="1">
+                <a:solidFill>
+                  <a:srgbClr val="00B050"/>
+                </a:solidFill>
+                <a:latin typeface="Menlo" panose="020B0609030804020204" pitchFamily="49" charset="0"/>
+                <a:ea typeface="Menlo" panose="020B0609030804020204" pitchFamily="49" charset="0"/>
+                <a:cs typeface="Menlo" panose="020B0609030804020204" pitchFamily="49" charset="0"/>
+              </a:rPr>
+              <a:t>climate.xlsx</a:t>
+            </a:r>
+            <a:r>
+              <a:rPr lang="da-DK" dirty="0">
+                <a:latin typeface="Menlo" panose="020B0609030804020204" pitchFamily="49" charset="0"/>
+                <a:ea typeface="Menlo" panose="020B0609030804020204" pitchFamily="49" charset="0"/>
+                <a:cs typeface="Menlo" panose="020B0609030804020204" pitchFamily="49" charset="0"/>
+              </a:rPr>
+              <a:t>")</a:t>
+            </a:r>
+          </a:p>
+        </p:txBody>
+      </p:sp>
+    </p:spTree>
+    <p:extLst>
+      <p:ext uri="{BB962C8B-B14F-4D97-AF65-F5344CB8AC3E}">
+        <p14:creationId xmlns:p14="http://schemas.microsoft.com/office/powerpoint/2010/main" val="1673311064"/>
       </p:ext>
     </p:extLst>
   </p:cSld>

--- a/Teachers/Figures/make_figures.pptx
+++ b/Teachers/Figures/make_figures.pptx
@@ -5,12 +5,13 @@
     <p:sldMasterId id="2147483648" r:id="rId1"/>
   </p:sldMasterIdLst>
   <p:notesMasterIdLst>
-    <p:notesMasterId r:id="rId5"/>
+    <p:notesMasterId r:id="rId6"/>
   </p:notesMasterIdLst>
   <p:sldIdLst>
     <p:sldId id="256" r:id="rId2"/>
     <p:sldId id="257" r:id="rId3"/>
     <p:sldId id="258" r:id="rId4"/>
+    <p:sldId id="259" r:id="rId5"/>
   </p:sldIdLst>
   <p:sldSz cx="12192000" cy="6858000"/>
   <p:notesSz cx="6858000" cy="9144000"/>
@@ -199,7 +200,7 @@
           <a:p>
             <a:fld id="{B3F190BB-0568-5849-97E9-7CC984FEB8A5}" type="datetimeFigureOut">
               <a:rPr lang="da-DK" smtClean="0"/>
-              <a:t>03.04.2025</a:t>
+              <a:t>08.04.2025</a:t>
             </a:fld>
             <a:endParaRPr lang="da-DK"/>
           </a:p>
@@ -658,6 +659,114 @@
 </p:notes>
 </file>
 
+<file path=ppt/notesSlides/notesSlide3.xml><?xml version="1.0" encoding="utf-8"?>
+<p:notes xmlns:a="http://schemas.openxmlformats.org/drawingml/2006/main" xmlns:r="http://schemas.openxmlformats.org/officeDocument/2006/relationships" xmlns:p="http://schemas.openxmlformats.org/presentationml/2006/main">
+  <p:cSld>
+    <p:spTree>
+      <p:nvGrpSpPr>
+        <p:cNvPr id="1" name="">
+          <a:extLst>
+            <a:ext uri="{FF2B5EF4-FFF2-40B4-BE49-F238E27FC236}">
+              <a16:creationId xmlns:a16="http://schemas.microsoft.com/office/drawing/2014/main" id="{69164AD4-554E-8395-E655-C892D7B804DB}"/>
+            </a:ext>
+          </a:extLst>
+        </p:cNvPr>
+        <p:cNvGrpSpPr/>
+        <p:nvPr/>
+      </p:nvGrpSpPr>
+      <p:grpSpPr>
+        <a:xfrm>
+          <a:off x="0" y="0"/>
+          <a:ext cx="0" cy="0"/>
+          <a:chOff x="0" y="0"/>
+          <a:chExt cx="0" cy="0"/>
+        </a:xfrm>
+      </p:grpSpPr>
+      <p:sp>
+        <p:nvSpPr>
+          <p:cNvPr id="2" name="Pladsholder til slidebillede 1">
+            <a:extLst>
+              <a:ext uri="{FF2B5EF4-FFF2-40B4-BE49-F238E27FC236}">
+                <a16:creationId xmlns:a16="http://schemas.microsoft.com/office/drawing/2014/main" id="{529EF6E0-9BDE-0F7C-53DB-877B7A1AA679}"/>
+              </a:ext>
+            </a:extLst>
+          </p:cNvPr>
+          <p:cNvSpPr>
+            <a:spLocks noGrp="1" noRot="1" noChangeAspect="1"/>
+          </p:cNvSpPr>
+          <p:nvPr>
+            <p:ph type="sldImg"/>
+          </p:nvPr>
+        </p:nvSpPr>
+        <p:spPr/>
+      </p:sp>
+      <p:sp>
+        <p:nvSpPr>
+          <p:cNvPr id="3" name="Pladsholder til noter 2">
+            <a:extLst>
+              <a:ext uri="{FF2B5EF4-FFF2-40B4-BE49-F238E27FC236}">
+                <a16:creationId xmlns:a16="http://schemas.microsoft.com/office/drawing/2014/main" id="{F3059273-5C85-C889-C333-0AD5E34CA2F6}"/>
+              </a:ext>
+            </a:extLst>
+          </p:cNvPr>
+          <p:cNvSpPr>
+            <a:spLocks noGrp="1"/>
+          </p:cNvSpPr>
+          <p:nvPr>
+            <p:ph type="body" idx="1"/>
+          </p:nvPr>
+        </p:nvSpPr>
+        <p:spPr/>
+        <p:txBody>
+          <a:bodyPr/>
+          <a:lstStyle/>
+          <a:p>
+            <a:endParaRPr lang="da-DK" dirty="0"/>
+          </a:p>
+        </p:txBody>
+      </p:sp>
+      <p:sp>
+        <p:nvSpPr>
+          <p:cNvPr id="4" name="Pladsholder til slidenummer 3">
+            <a:extLst>
+              <a:ext uri="{FF2B5EF4-FFF2-40B4-BE49-F238E27FC236}">
+                <a16:creationId xmlns:a16="http://schemas.microsoft.com/office/drawing/2014/main" id="{22126EC1-503A-05B3-1082-95786A334BD7}"/>
+              </a:ext>
+            </a:extLst>
+          </p:cNvPr>
+          <p:cNvSpPr>
+            <a:spLocks noGrp="1"/>
+          </p:cNvSpPr>
+          <p:nvPr>
+            <p:ph type="sldNum" sz="quarter" idx="5"/>
+          </p:nvPr>
+        </p:nvSpPr>
+        <p:spPr/>
+        <p:txBody>
+          <a:bodyPr/>
+          <a:lstStyle/>
+          <a:p>
+            <a:fld id="{6F26A5D8-99E8-394D-BD4F-AB5771DC437A}" type="slidenum">
+              <a:rPr lang="da-DK" smtClean="0"/>
+              <a:t>4</a:t>
+            </a:fld>
+            <a:endParaRPr lang="da-DK"/>
+          </a:p>
+        </p:txBody>
+      </p:sp>
+    </p:spTree>
+    <p:extLst>
+      <p:ext uri="{BB962C8B-B14F-4D97-AF65-F5344CB8AC3E}">
+        <p14:creationId xmlns:p14="http://schemas.microsoft.com/office/powerpoint/2010/main" val="2658315653"/>
+      </p:ext>
+    </p:extLst>
+  </p:cSld>
+  <p:clrMapOvr>
+    <a:masterClrMapping/>
+  </p:clrMapOvr>
+</p:notes>
+</file>
+
 <file path=ppt/slideLayouts/slideLayout1.xml><?xml version="1.0" encoding="utf-8"?>
 <p:sldLayout xmlns:a="http://schemas.openxmlformats.org/drawingml/2006/main" xmlns:r="http://schemas.openxmlformats.org/officeDocument/2006/relationships" xmlns:p="http://schemas.openxmlformats.org/presentationml/2006/main" type="title" preserve="1">
   <p:cSld name="Titelslide">
@@ -805,7 +914,7 @@
           <a:p>
             <a:fld id="{24B4D684-1A4E-3A4C-BB71-BA4209553AB4}" type="datetimeFigureOut">
               <a:rPr lang="da-DK" smtClean="0"/>
-              <a:t>03.04.2025</a:t>
+              <a:t>08.04.2025</a:t>
             </a:fld>
             <a:endParaRPr lang="da-DK"/>
           </a:p>
@@ -1003,7 +1112,7 @@
           <a:p>
             <a:fld id="{24B4D684-1A4E-3A4C-BB71-BA4209553AB4}" type="datetimeFigureOut">
               <a:rPr lang="da-DK" smtClean="0"/>
-              <a:t>03.04.2025</a:t>
+              <a:t>08.04.2025</a:t>
             </a:fld>
             <a:endParaRPr lang="da-DK"/>
           </a:p>
@@ -1211,7 +1320,7 @@
           <a:p>
             <a:fld id="{24B4D684-1A4E-3A4C-BB71-BA4209553AB4}" type="datetimeFigureOut">
               <a:rPr lang="da-DK" smtClean="0"/>
-              <a:t>03.04.2025</a:t>
+              <a:t>08.04.2025</a:t>
             </a:fld>
             <a:endParaRPr lang="da-DK"/>
           </a:p>
@@ -1409,7 +1518,7 @@
           <a:p>
             <a:fld id="{24B4D684-1A4E-3A4C-BB71-BA4209553AB4}" type="datetimeFigureOut">
               <a:rPr lang="da-DK" smtClean="0"/>
-              <a:t>03.04.2025</a:t>
+              <a:t>08.04.2025</a:t>
             </a:fld>
             <a:endParaRPr lang="da-DK"/>
           </a:p>
@@ -1684,7 +1793,7 @@
           <a:p>
             <a:fld id="{24B4D684-1A4E-3A4C-BB71-BA4209553AB4}" type="datetimeFigureOut">
               <a:rPr lang="da-DK" smtClean="0"/>
-              <a:t>03.04.2025</a:t>
+              <a:t>08.04.2025</a:t>
             </a:fld>
             <a:endParaRPr lang="da-DK"/>
           </a:p>
@@ -1949,7 +2058,7 @@
           <a:p>
             <a:fld id="{24B4D684-1A4E-3A4C-BB71-BA4209553AB4}" type="datetimeFigureOut">
               <a:rPr lang="da-DK" smtClean="0"/>
-              <a:t>03.04.2025</a:t>
+              <a:t>08.04.2025</a:t>
             </a:fld>
             <a:endParaRPr lang="da-DK"/>
           </a:p>
@@ -2361,7 +2470,7 @@
           <a:p>
             <a:fld id="{24B4D684-1A4E-3A4C-BB71-BA4209553AB4}" type="datetimeFigureOut">
               <a:rPr lang="da-DK" smtClean="0"/>
-              <a:t>03.04.2025</a:t>
+              <a:t>08.04.2025</a:t>
             </a:fld>
             <a:endParaRPr lang="da-DK"/>
           </a:p>
@@ -2502,7 +2611,7 @@
           <a:p>
             <a:fld id="{24B4D684-1A4E-3A4C-BB71-BA4209553AB4}" type="datetimeFigureOut">
               <a:rPr lang="da-DK" smtClean="0"/>
-              <a:t>03.04.2025</a:t>
+              <a:t>08.04.2025</a:t>
             </a:fld>
             <a:endParaRPr lang="da-DK"/>
           </a:p>
@@ -2615,7 +2724,7 @@
           <a:p>
             <a:fld id="{24B4D684-1A4E-3A4C-BB71-BA4209553AB4}" type="datetimeFigureOut">
               <a:rPr lang="da-DK" smtClean="0"/>
-              <a:t>03.04.2025</a:t>
+              <a:t>08.04.2025</a:t>
             </a:fld>
             <a:endParaRPr lang="da-DK"/>
           </a:p>
@@ -2926,7 +3035,7 @@
           <a:p>
             <a:fld id="{24B4D684-1A4E-3A4C-BB71-BA4209553AB4}" type="datetimeFigureOut">
               <a:rPr lang="da-DK" smtClean="0"/>
-              <a:t>03.04.2025</a:t>
+              <a:t>08.04.2025</a:t>
             </a:fld>
             <a:endParaRPr lang="da-DK"/>
           </a:p>
@@ -3214,7 +3323,7 @@
           <a:p>
             <a:fld id="{24B4D684-1A4E-3A4C-BB71-BA4209553AB4}" type="datetimeFigureOut">
               <a:rPr lang="da-DK" smtClean="0"/>
-              <a:t>03.04.2025</a:t>
+              <a:t>08.04.2025</a:t>
             </a:fld>
             <a:endParaRPr lang="da-DK"/>
           </a:p>
@@ -3455,7 +3564,7 @@
           <a:p>
             <a:fld id="{24B4D684-1A4E-3A4C-BB71-BA4209553AB4}" type="datetimeFigureOut">
               <a:rPr lang="da-DK" smtClean="0"/>
-              <a:t>03.04.2025</a:t>
+              <a:t>08.04.2025</a:t>
             </a:fld>
             <a:endParaRPr lang="da-DK"/>
           </a:p>
@@ -4685,7 +4794,7 @@
             <a:pPr algn="ctr"/>
             <a:r>
               <a:rPr lang="da-DK" dirty="0"/>
-              <a:t>presentation1A.qmd</a:t>
+              <a:t>presentation1.qmd</a:t>
             </a:r>
           </a:p>
         </p:txBody>
@@ -6642,6 +6751,402 @@
     <p:extLst>
       <p:ext uri="{BB962C8B-B14F-4D97-AF65-F5344CB8AC3E}">
         <p14:creationId xmlns:p14="http://schemas.microsoft.com/office/powerpoint/2010/main" val="1673311064"/>
+      </p:ext>
+    </p:extLst>
+  </p:cSld>
+  <p:clrMapOvr>
+    <a:masterClrMapping/>
+  </p:clrMapOvr>
+</p:sld>
+</file>
+
+<file path=ppt/slides/slide4.xml><?xml version="1.0" encoding="utf-8"?>
+<p:sld xmlns:a="http://schemas.openxmlformats.org/drawingml/2006/main" xmlns:r="http://schemas.openxmlformats.org/officeDocument/2006/relationships" xmlns:p="http://schemas.openxmlformats.org/presentationml/2006/main">
+  <p:cSld>
+    <p:spTree>
+      <p:nvGrpSpPr>
+        <p:cNvPr id="1" name="">
+          <a:extLst>
+            <a:ext uri="{FF2B5EF4-FFF2-40B4-BE49-F238E27FC236}">
+              <a16:creationId xmlns:a16="http://schemas.microsoft.com/office/drawing/2014/main" id="{CF3A75A4-1C41-DE09-BBD5-139ACB6F74B8}"/>
+            </a:ext>
+          </a:extLst>
+        </p:cNvPr>
+        <p:cNvGrpSpPr/>
+        <p:nvPr/>
+      </p:nvGrpSpPr>
+      <p:grpSpPr>
+        <a:xfrm>
+          <a:off x="0" y="0"/>
+          <a:ext cx="0" cy="0"/>
+          <a:chOff x="0" y="0"/>
+          <a:chExt cx="0" cy="0"/>
+        </a:xfrm>
+      </p:grpSpPr>
+      <p:pic>
+        <p:nvPicPr>
+          <p:cNvPr id="27" name="Billede 26">
+            <a:extLst>
+              <a:ext uri="{FF2B5EF4-FFF2-40B4-BE49-F238E27FC236}">
+                <a16:creationId xmlns:a16="http://schemas.microsoft.com/office/drawing/2014/main" id="{05767C7D-688C-F3D8-1D00-760897FDAED3}"/>
+              </a:ext>
+            </a:extLst>
+          </p:cNvPr>
+          <p:cNvPicPr>
+            <a:picLocks noChangeAspect="1"/>
+          </p:cNvPicPr>
+          <p:nvPr/>
+        </p:nvPicPr>
+        <p:blipFill>
+          <a:blip r:embed="rId3"/>
+          <a:stretch>
+            <a:fillRect/>
+          </a:stretch>
+        </p:blipFill>
+        <p:spPr>
+          <a:xfrm>
+            <a:off x="3194491" y="3429743"/>
+            <a:ext cx="5320308" cy="3413673"/>
+          </a:xfrm>
+          <a:prstGeom prst="rect">
+            <a:avLst/>
+          </a:prstGeom>
+        </p:spPr>
+      </p:pic>
+      <p:cxnSp>
+        <p:nvCxnSpPr>
+          <p:cNvPr id="30" name="Lige forbindelse 29">
+            <a:extLst>
+              <a:ext uri="{FF2B5EF4-FFF2-40B4-BE49-F238E27FC236}">
+                <a16:creationId xmlns:a16="http://schemas.microsoft.com/office/drawing/2014/main" id="{78280474-F4CD-F47F-7A87-35D204AA17B7}"/>
+              </a:ext>
+            </a:extLst>
+          </p:cNvPr>
+          <p:cNvCxnSpPr>
+            <a:cxnSpLocks/>
+          </p:cNvCxnSpPr>
+          <p:nvPr/>
+        </p:nvCxnSpPr>
+        <p:spPr>
+          <a:xfrm>
+            <a:off x="5514162" y="3085751"/>
+            <a:ext cx="0" cy="266480"/>
+          </a:xfrm>
+          <a:prstGeom prst="line">
+            <a:avLst/>
+          </a:prstGeom>
+        </p:spPr>
+        <p:style>
+          <a:lnRef idx="2">
+            <a:schemeClr val="dk1"/>
+          </a:lnRef>
+          <a:fillRef idx="0">
+            <a:schemeClr val="dk1"/>
+          </a:fillRef>
+          <a:effectRef idx="1">
+            <a:schemeClr val="dk1"/>
+          </a:effectRef>
+          <a:fontRef idx="minor">
+            <a:schemeClr val="tx1"/>
+          </a:fontRef>
+        </p:style>
+      </p:cxnSp>
+      <p:pic>
+        <p:nvPicPr>
+          <p:cNvPr id="38" name="Grafik 37" descr="Mappe kontur">
+            <a:extLst>
+              <a:ext uri="{FF2B5EF4-FFF2-40B4-BE49-F238E27FC236}">
+                <a16:creationId xmlns:a16="http://schemas.microsoft.com/office/drawing/2014/main" id="{820064CF-B7C0-B293-F2D1-B8DC2FC5438F}"/>
+              </a:ext>
+            </a:extLst>
+          </p:cNvPr>
+          <p:cNvPicPr>
+            <a:picLocks noChangeAspect="1"/>
+          </p:cNvPicPr>
+          <p:nvPr/>
+        </p:nvPicPr>
+        <p:blipFill>
+          <a:blip r:embed="rId4">
+            <a:extLst>
+              <a:ext uri="{96DAC541-7B7A-43D3-8B79-37D633B846F1}">
+                <asvg:svgBlip xmlns:asvg="http://schemas.microsoft.com/office/drawing/2016/SVG/main" r:embed="rId5"/>
+              </a:ext>
+            </a:extLst>
+          </a:blip>
+          <a:stretch>
+            <a:fillRect/>
+          </a:stretch>
+        </p:blipFill>
+        <p:spPr>
+          <a:xfrm>
+            <a:off x="5169189" y="2292871"/>
+            <a:ext cx="689945" cy="689945"/>
+          </a:xfrm>
+          <a:prstGeom prst="rect">
+            <a:avLst/>
+          </a:prstGeom>
+        </p:spPr>
+      </p:pic>
+      <p:sp>
+        <p:nvSpPr>
+          <p:cNvPr id="39" name="Tekstfelt 38">
+            <a:extLst>
+              <a:ext uri="{FF2B5EF4-FFF2-40B4-BE49-F238E27FC236}">
+                <a16:creationId xmlns:a16="http://schemas.microsoft.com/office/drawing/2014/main" id="{5C291AC3-BFED-54E9-03C6-E4F366D693CA}"/>
+              </a:ext>
+            </a:extLst>
+          </p:cNvPr>
+          <p:cNvSpPr txBox="1"/>
+          <p:nvPr/>
+        </p:nvSpPr>
+        <p:spPr>
+          <a:xfrm>
+            <a:off x="5169189" y="2823552"/>
+            <a:ext cx="744243" cy="276999"/>
+          </a:xfrm>
+          <a:prstGeom prst="rect">
+            <a:avLst/>
+          </a:prstGeom>
+          <a:noFill/>
+        </p:spPr>
+        <p:txBody>
+          <a:bodyPr wrap="none" rtlCol="0">
+            <a:spAutoFit/>
+          </a:bodyPr>
+          <a:lstStyle/>
+          <a:p>
+            <a:r>
+              <a:rPr lang="da-DK" sz="1200" dirty="0"/>
+              <a:t>Courses</a:t>
+            </a:r>
+            <a:endParaRPr lang="da-DK" dirty="0"/>
+          </a:p>
+        </p:txBody>
+      </p:sp>
+      <p:cxnSp>
+        <p:nvCxnSpPr>
+          <p:cNvPr id="41" name="Lige forbindelse 40">
+            <a:extLst>
+              <a:ext uri="{FF2B5EF4-FFF2-40B4-BE49-F238E27FC236}">
+                <a16:creationId xmlns:a16="http://schemas.microsoft.com/office/drawing/2014/main" id="{4CB5290D-315C-A528-DE0A-3D767035264C}"/>
+              </a:ext>
+            </a:extLst>
+          </p:cNvPr>
+          <p:cNvCxnSpPr>
+            <a:cxnSpLocks/>
+          </p:cNvCxnSpPr>
+          <p:nvPr/>
+        </p:nvCxnSpPr>
+        <p:spPr>
+          <a:xfrm>
+            <a:off x="5518054" y="2026391"/>
+            <a:ext cx="0" cy="266480"/>
+          </a:xfrm>
+          <a:prstGeom prst="line">
+            <a:avLst/>
+          </a:prstGeom>
+        </p:spPr>
+        <p:style>
+          <a:lnRef idx="2">
+            <a:schemeClr val="dk1"/>
+          </a:lnRef>
+          <a:fillRef idx="0">
+            <a:schemeClr val="dk1"/>
+          </a:fillRef>
+          <a:effectRef idx="1">
+            <a:schemeClr val="dk1"/>
+          </a:effectRef>
+          <a:fontRef idx="minor">
+            <a:schemeClr val="tx1"/>
+          </a:fontRef>
+        </p:style>
+      </p:cxnSp>
+      <p:pic>
+        <p:nvPicPr>
+          <p:cNvPr id="42" name="Grafik 41" descr="Mappe kontur">
+            <a:extLst>
+              <a:ext uri="{FF2B5EF4-FFF2-40B4-BE49-F238E27FC236}">
+                <a16:creationId xmlns:a16="http://schemas.microsoft.com/office/drawing/2014/main" id="{886D1291-804B-11DE-F4EE-484963703B1D}"/>
+              </a:ext>
+            </a:extLst>
+          </p:cNvPr>
+          <p:cNvPicPr>
+            <a:picLocks noChangeAspect="1"/>
+          </p:cNvPicPr>
+          <p:nvPr/>
+        </p:nvPicPr>
+        <p:blipFill>
+          <a:blip r:embed="rId4">
+            <a:extLst>
+              <a:ext uri="{96DAC541-7B7A-43D3-8B79-37D633B846F1}">
+                <asvg:svgBlip xmlns:asvg="http://schemas.microsoft.com/office/drawing/2016/SVG/main" r:embed="rId5"/>
+              </a:ext>
+            </a:extLst>
+          </a:blip>
+          <a:stretch>
+            <a:fillRect/>
+          </a:stretch>
+        </p:blipFill>
+        <p:spPr>
+          <a:xfrm>
+            <a:off x="5169189" y="1155019"/>
+            <a:ext cx="689945" cy="689945"/>
+          </a:xfrm>
+          <a:prstGeom prst="rect">
+            <a:avLst/>
+          </a:prstGeom>
+        </p:spPr>
+      </p:pic>
+      <p:sp>
+        <p:nvSpPr>
+          <p:cNvPr id="43" name="Tekstfelt 42">
+            <a:extLst>
+              <a:ext uri="{FF2B5EF4-FFF2-40B4-BE49-F238E27FC236}">
+                <a16:creationId xmlns:a16="http://schemas.microsoft.com/office/drawing/2014/main" id="{431503E6-9549-1254-36DE-83650DF33786}"/>
+              </a:ext>
+            </a:extLst>
+          </p:cNvPr>
+          <p:cNvSpPr txBox="1"/>
+          <p:nvPr/>
+        </p:nvSpPr>
+        <p:spPr>
+          <a:xfrm>
+            <a:off x="5270755" y="1687044"/>
+            <a:ext cx="530273" cy="276999"/>
+          </a:xfrm>
+          <a:prstGeom prst="rect">
+            <a:avLst/>
+          </a:prstGeom>
+          <a:noFill/>
+        </p:spPr>
+        <p:txBody>
+          <a:bodyPr wrap="none" rtlCol="0">
+            <a:spAutoFit/>
+          </a:bodyPr>
+          <a:lstStyle/>
+          <a:p>
+            <a:r>
+              <a:rPr lang="da-DK" sz="1200" dirty="0"/>
+              <a:t>Work</a:t>
+            </a:r>
+            <a:endParaRPr lang="da-DK" dirty="0"/>
+          </a:p>
+        </p:txBody>
+      </p:sp>
+      <p:cxnSp>
+        <p:nvCxnSpPr>
+          <p:cNvPr id="44" name="Lige forbindelse 43">
+            <a:extLst>
+              <a:ext uri="{FF2B5EF4-FFF2-40B4-BE49-F238E27FC236}">
+                <a16:creationId xmlns:a16="http://schemas.microsoft.com/office/drawing/2014/main" id="{4C70254E-E7A9-B426-5B52-CE4B7804191F}"/>
+              </a:ext>
+            </a:extLst>
+          </p:cNvPr>
+          <p:cNvCxnSpPr>
+            <a:cxnSpLocks/>
+          </p:cNvCxnSpPr>
+          <p:nvPr/>
+        </p:nvCxnSpPr>
+        <p:spPr>
+          <a:xfrm>
+            <a:off x="5509672" y="901337"/>
+            <a:ext cx="0" cy="266480"/>
+          </a:xfrm>
+          <a:prstGeom prst="line">
+            <a:avLst/>
+          </a:prstGeom>
+        </p:spPr>
+        <p:style>
+          <a:lnRef idx="2">
+            <a:schemeClr val="dk1"/>
+          </a:lnRef>
+          <a:fillRef idx="0">
+            <a:schemeClr val="dk1"/>
+          </a:fillRef>
+          <a:effectRef idx="1">
+            <a:schemeClr val="dk1"/>
+          </a:effectRef>
+          <a:fontRef idx="minor">
+            <a:schemeClr val="tx1"/>
+          </a:fontRef>
+        </p:style>
+      </p:cxnSp>
+      <p:pic>
+        <p:nvPicPr>
+          <p:cNvPr id="46" name="Grafik 45" descr="Mappe kontur">
+            <a:extLst>
+              <a:ext uri="{FF2B5EF4-FFF2-40B4-BE49-F238E27FC236}">
+                <a16:creationId xmlns:a16="http://schemas.microsoft.com/office/drawing/2014/main" id="{7868AA3E-F1A9-AA7F-A562-B1FF299DA88F}"/>
+              </a:ext>
+            </a:extLst>
+          </p:cNvPr>
+          <p:cNvPicPr>
+            <a:picLocks noChangeAspect="1"/>
+          </p:cNvPicPr>
+          <p:nvPr/>
+        </p:nvPicPr>
+        <p:blipFill>
+          <a:blip r:embed="rId4">
+            <a:extLst>
+              <a:ext uri="{96DAC541-7B7A-43D3-8B79-37D633B846F1}">
+                <asvg:svgBlip xmlns:asvg="http://schemas.microsoft.com/office/drawing/2016/SVG/main" r:embed="rId5"/>
+              </a:ext>
+            </a:extLst>
+          </a:blip>
+          <a:stretch>
+            <a:fillRect/>
+          </a:stretch>
+        </p:blipFill>
+        <p:spPr>
+          <a:xfrm>
+            <a:off x="5164700" y="66494"/>
+            <a:ext cx="689945" cy="689945"/>
+          </a:xfrm>
+          <a:prstGeom prst="rect">
+            <a:avLst/>
+          </a:prstGeom>
+        </p:spPr>
+      </p:pic>
+      <p:sp>
+        <p:nvSpPr>
+          <p:cNvPr id="49" name="Tekstfelt 48">
+            <a:extLst>
+              <a:ext uri="{FF2B5EF4-FFF2-40B4-BE49-F238E27FC236}">
+                <a16:creationId xmlns:a16="http://schemas.microsoft.com/office/drawing/2014/main" id="{240B63A4-6BCA-83CB-40C4-898CAA45A112}"/>
+              </a:ext>
+            </a:extLst>
+          </p:cNvPr>
+          <p:cNvSpPr txBox="1"/>
+          <p:nvPr/>
+        </p:nvSpPr>
+        <p:spPr>
+          <a:xfrm>
+            <a:off x="5146862" y="624338"/>
+            <a:ext cx="742383" cy="276999"/>
+          </a:xfrm>
+          <a:prstGeom prst="rect">
+            <a:avLst/>
+          </a:prstGeom>
+          <a:noFill/>
+        </p:spPr>
+        <p:txBody>
+          <a:bodyPr wrap="none" rtlCol="0">
+            <a:spAutoFit/>
+          </a:bodyPr>
+          <a:lstStyle/>
+          <a:p>
+            <a:r>
+              <a:rPr lang="da-DK" sz="1200" dirty="0"/>
+              <a:t>Desktop</a:t>
+            </a:r>
+            <a:endParaRPr lang="da-DK" dirty="0"/>
+          </a:p>
+        </p:txBody>
+      </p:sp>
+    </p:spTree>
+    <p:extLst>
+      <p:ext uri="{BB962C8B-B14F-4D97-AF65-F5344CB8AC3E}">
+        <p14:creationId xmlns:p14="http://schemas.microsoft.com/office/powerpoint/2010/main" val="2570586410"/>
       </p:ext>
     </p:extLst>
   </p:cSld>
